--- a/docs/RAG_OpenAgenda_presentation.pptx
+++ b/docs/RAG_OpenAgenda_presentation.pptx
@@ -9098,7 +9098,7 @@
                 </a:solidFill>
                 <a:latin typeface="Aptos Display"/>
               </a:rPr>
-              <a:t>Les données : OpenAgenda</a:t>
+              <a:t>Collecter les événements OpenAgenda</a:t>
             </a:r>
           </a:p>
         </p:txBody>
@@ -9133,7 +9133,7 @@
                 </a:solidFill>
                 <a:latin typeface="Aptos"/>
               </a:rPr>
-              <a:t>Transformer des fiches événementielles en données faciles à rechercher.</a:t>
+              <a:t>Une collecte traçable, ciblée sur l'Île-de-France et rejouable pour reconstruire l'index.</a:t>
             </a:r>
           </a:p>
         </p:txBody>
@@ -9286,8 +9286,8 @@
                 </a:solidFill>
                 <a:latin typeface="Aptos"/>
               </a:rPr>
-              <a:t>Collecte ciblée sur
-l'Île-de-France</a:t>
+              <a:t>Événements publiés
+en français</a:t>
             </a:r>
           </a:p>
         </p:txBody>
@@ -9301,7 +9301,7 @@
         <p:spPr>
           <a:xfrm>
             <a:off x="914400" y="4736592"/>
-            <a:ext cx="548640" cy="228600"/>
+            <a:ext cx="1371600" cy="228600"/>
           </a:xfrm>
           <a:prstGeom prst="rect">
             <a:avLst/>
@@ -9322,7 +9322,7 @@
                 </a:solidFill>
                 <a:latin typeface="Aptos"/>
               </a:rPr>
-              <a:t>API</a:t>
+              <a:t>API OpenAgenda</a:t>
             </a:r>
           </a:p>
         </p:txBody>
@@ -9439,7 +9439,7 @@
                 </a:solidFill>
                 <a:latin typeface="Aptos"/>
               </a:rPr>
-              <a:t>Normalisation JSONL</a:t>
+              <a:t>Stratégie robuste</a:t>
             </a:r>
           </a:p>
         </p:txBody>
@@ -9474,8 +9474,8 @@
                 </a:solidFill>
                 <a:latin typeface="Aptos"/>
               </a:rPr>
-              <a:t>Un format stable,
-une ligne par événement</a:t>
+              <a:t>Mode auto : recherche
+transverse ou par agendas</a:t>
             </a:r>
           </a:p>
         </p:txBody>
@@ -9510,8 +9510,8 @@
                 </a:solidFill>
                 <a:latin typeface="Aptos"/>
               </a:rPr>
-              <a:t>Titre · description · dates
-lieu · catégories · agendas</a:t>
+              <a:t>Fenêtre :
+maintenant − 365 jours</a:t>
             </a:r>
           </a:p>
         </p:txBody>
@@ -9622,13 +9622,13 @@
           <a:p>
             <a:pPr algn="l"/>
             <a:r>
-              <a:rPr sz="2100" b="1">
+              <a:rPr sz="1900" b="1">
                 <a:solidFill>
                   <a:srgbClr val="FFFFFF"/>
                 </a:solidFill>
                 <a:latin typeface="Aptos"/>
               </a:rPr>
-              <a:t>document</a:t>
+              <a:t>JSONL + manifeste</a:t>
             </a:r>
           </a:p>
         </p:txBody>
@@ -9663,8 +9663,8 @@
                 </a:solidFill>
                 <a:latin typeface="Aptos"/>
               </a:rPr>
-              <a:t>Texte regroupé
-pour la recherche</a:t>
+              <a:t>Une ligne par
+événement normalisé</a:t>
             </a:r>
           </a:p>
         </p:txBody>
@@ -9699,8 +9699,8 @@
                 </a:solidFill>
                 <a:latin typeface="Aptos"/>
               </a:rPr>
-              <a:t>Base du découpage
-en chunks et des embeddings</a:t>
+              <a:t>Le manifeste trace
+le run et ses filtres</a:t>
             </a:r>
           </a:p>
         </p:txBody>
@@ -9956,7 +9956,7 @@
                 </a:solidFill>
                 <a:latin typeface="Aptos Display"/>
               </a:rPr>
-              <a:t>Préparer les données</a:t>
+              <a:t>Nettoyer et normaliser</a:t>
             </a:r>
           </a:p>
         </p:txBody>
@@ -9991,7 +9991,7 @@
                 </a:solidFill>
                 <a:latin typeface="Aptos"/>
               </a:rPr>
-              <a:t>Le moteur est préparé une fois, avant les recherches des utilisateurs.</a:t>
+              <a:t>Transformer les réponses hétérogènes de l'API en fiches stables et exploitables.</a:t>
             </a:r>
           </a:p>
         </p:txBody>
@@ -10004,8 +10004,8 @@
         </p:nvSpPr>
         <p:spPr>
           <a:xfrm>
-            <a:off x="640080" y="2423160"/>
-            <a:ext cx="1874519" cy="1417320"/>
+            <a:off x="640080" y="1874519"/>
+            <a:ext cx="3520440" cy="3566160"/>
           </a:xfrm>
           <a:prstGeom prst="roundRect">
             <a:avLst>
@@ -10051,21 +10051,21 @@
         </p:nvSpPr>
         <p:spPr>
           <a:xfrm>
-            <a:off x="777240" y="2724912"/>
-            <a:ext cx="1600200" cy="237744"/>
-          </a:xfrm>
-          <a:prstGeom prst="rect">
-            <a:avLst/>
-          </a:prstGeom>
-          <a:noFill/>
-        </p:spPr>
-        <p:txBody>
-          <a:bodyPr wrap="square" anchor="t">
-            <a:spAutoFit/>
-          </a:bodyPr>
-          <a:lstStyle/>
-          <a:p>
-            <a:pPr algn="ctr"/>
+            <a:off x="896112" y="2093976"/>
+            <a:ext cx="3008376" cy="320040"/>
+          </a:xfrm>
+          <a:prstGeom prst="rect">
+            <a:avLst/>
+          </a:prstGeom>
+          <a:noFill/>
+        </p:spPr>
+        <p:txBody>
+          <a:bodyPr wrap="square" anchor="t">
+            <a:spAutoFit/>
+          </a:bodyPr>
+          <a:lstStyle/>
+          <a:p>
+            <a:pPr algn="l"/>
             <a:r>
               <a:rPr sz="1600" b="1">
                 <a:solidFill>
@@ -10073,7 +10073,7 @@
                 </a:solidFill>
                 <a:latin typeface="Aptos"/>
               </a:rPr>
-              <a:t>Collecte</a:t>
+              <a:t>Données nettoyées</a:t>
             </a:r>
           </a:p>
         </p:txBody>
@@ -10086,78 +10086,218 @@
         </p:nvSpPr>
         <p:spPr>
           <a:xfrm>
-            <a:off x="777240" y="3145536"/>
-            <a:ext cx="1600200" cy="201168"/>
-          </a:xfrm>
-          <a:prstGeom prst="rect">
-            <a:avLst/>
-          </a:prstGeom>
-          <a:noFill/>
-        </p:spPr>
-        <p:txBody>
-          <a:bodyPr wrap="square" anchor="t">
-            <a:spAutoFit/>
-          </a:bodyPr>
-          <a:lstStyle/>
-          <a:p>
-            <a:pPr algn="ctr"/>
-            <a:r>
-              <a:rPr sz="1100" b="0">
+            <a:off x="914400" y="2560320"/>
+            <a:ext cx="164592" cy="210312"/>
+          </a:xfrm>
+          <a:prstGeom prst="rect">
+            <a:avLst/>
+          </a:prstGeom>
+          <a:noFill/>
+        </p:spPr>
+        <p:txBody>
+          <a:bodyPr wrap="square" anchor="t">
+            <a:spAutoFit/>
+          </a:bodyPr>
+          <a:lstStyle/>
+          <a:p>
+            <a:pPr algn="l"/>
+            <a:r>
+              <a:rPr sz="1600" b="1">
+                <a:solidFill>
+                  <a:srgbClr val="B74F2A"/>
+                </a:solidFill>
+                <a:latin typeface="Aptos"/>
+              </a:rPr>
+              <a:t>•</a:t>
+            </a:r>
+          </a:p>
+        </p:txBody>
+      </p:sp>
+      <p:sp>
+        <p:nvSpPr>
+          <p:cNvPr id="12" name="TextBox 11"/>
+          <p:cNvSpPr txBox="1"/>
+          <p:nvPr/>
+        </p:nvSpPr>
+        <p:spPr>
+          <a:xfrm>
+            <a:off x="1143000" y="2560320"/>
+            <a:ext cx="2761488" cy="438912"/>
+          </a:xfrm>
+          <a:prstGeom prst="rect">
+            <a:avLst/>
+          </a:prstGeom>
+          <a:noFill/>
+        </p:spPr>
+        <p:txBody>
+          <a:bodyPr wrap="square" anchor="t">
+            <a:spAutoFit/>
+          </a:bodyPr>
+          <a:lstStyle/>
+          <a:p>
+            <a:pPr algn="l"/>
+            <a:r>
+              <a:rPr sz="1300" b="0">
                 <a:solidFill>
                   <a:srgbClr val="62584D"/>
                 </a:solidFill>
                 <a:latin typeface="Aptos"/>
               </a:rPr>
-              <a:t>OpenAgenda</a:t>
-            </a:r>
-          </a:p>
-        </p:txBody>
-      </p:sp>
-      <p:sp>
-        <p:nvSpPr>
-          <p:cNvPr id="12" name="TextBox 11"/>
-          <p:cNvSpPr txBox="1"/>
-          <p:nvPr/>
-        </p:nvSpPr>
-        <p:spPr>
-          <a:xfrm>
-            <a:off x="2542032" y="2907792"/>
-            <a:ext cx="310896" cy="237744"/>
-          </a:xfrm>
-          <a:prstGeom prst="rect">
-            <a:avLst/>
-          </a:prstGeom>
-          <a:noFill/>
-        </p:spPr>
-        <p:txBody>
-          <a:bodyPr wrap="square" anchor="t">
-            <a:spAutoFit/>
-          </a:bodyPr>
-          <a:lstStyle/>
-          <a:p>
-            <a:pPr algn="ctr"/>
-            <a:r>
-              <a:rPr sz="1900" b="1">
+              <a:t>Français privilégié pour les champs multilingues.</a:t>
+            </a:r>
+          </a:p>
+        </p:txBody>
+      </p:sp>
+      <p:sp>
+        <p:nvSpPr>
+          <p:cNvPr id="13" name="TextBox 12"/>
+          <p:cNvSpPr txBox="1"/>
+          <p:nvPr/>
+        </p:nvSpPr>
+        <p:spPr>
+          <a:xfrm>
+            <a:off x="914400" y="3182112"/>
+            <a:ext cx="164592" cy="210312"/>
+          </a:xfrm>
+          <a:prstGeom prst="rect">
+            <a:avLst/>
+          </a:prstGeom>
+          <a:noFill/>
+        </p:spPr>
+        <p:txBody>
+          <a:bodyPr wrap="square" anchor="t">
+            <a:spAutoFit/>
+          </a:bodyPr>
+          <a:lstStyle/>
+          <a:p>
+            <a:pPr algn="l"/>
+            <a:r>
+              <a:rPr sz="1600" b="1">
                 <a:solidFill>
                   <a:srgbClr val="B74F2A"/>
                 </a:solidFill>
                 <a:latin typeface="Aptos"/>
               </a:rPr>
-              <a:t>→</a:t>
-            </a:r>
-          </a:p>
-        </p:txBody>
-      </p:sp>
-      <p:sp>
-        <p:nvSpPr>
-          <p:cNvPr id="13" name="Rounded Rectangle 12"/>
+              <a:t>•</a:t>
+            </a:r>
+          </a:p>
+        </p:txBody>
+      </p:sp>
+      <p:sp>
+        <p:nvSpPr>
+          <p:cNvPr id="14" name="TextBox 13"/>
+          <p:cNvSpPr txBox="1"/>
+          <p:nvPr/>
+        </p:nvSpPr>
+        <p:spPr>
+          <a:xfrm>
+            <a:off x="1143000" y="3182112"/>
+            <a:ext cx="2761488" cy="438912"/>
+          </a:xfrm>
+          <a:prstGeom prst="rect">
+            <a:avLst/>
+          </a:prstGeom>
+          <a:noFill/>
+        </p:spPr>
+        <p:txBody>
+          <a:bodyPr wrap="square" anchor="t">
+            <a:spAutoFit/>
+          </a:bodyPr>
+          <a:lstStyle/>
+          <a:p>
+            <a:pPr algn="l"/>
+            <a:r>
+              <a:rPr sz="1300" b="0">
+                <a:solidFill>
+                  <a:srgbClr val="62584D"/>
+                </a:solidFill>
+                <a:latin typeface="Aptos"/>
+              </a:rPr>
+              <a:t>Lieu normalisé : ville, département, région.</a:t>
+            </a:r>
+          </a:p>
+        </p:txBody>
+      </p:sp>
+      <p:sp>
+        <p:nvSpPr>
+          <p:cNvPr id="15" name="TextBox 14"/>
+          <p:cNvSpPr txBox="1"/>
+          <p:nvPr/>
+        </p:nvSpPr>
+        <p:spPr>
+          <a:xfrm>
+            <a:off x="914400" y="3803904"/>
+            <a:ext cx="164592" cy="210312"/>
+          </a:xfrm>
+          <a:prstGeom prst="rect">
+            <a:avLst/>
+          </a:prstGeom>
+          <a:noFill/>
+        </p:spPr>
+        <p:txBody>
+          <a:bodyPr wrap="square" anchor="t">
+            <a:spAutoFit/>
+          </a:bodyPr>
+          <a:lstStyle/>
+          <a:p>
+            <a:pPr algn="l"/>
+            <a:r>
+              <a:rPr sz="1600" b="1">
+                <a:solidFill>
+                  <a:srgbClr val="B74F2A"/>
+                </a:solidFill>
+                <a:latin typeface="Aptos"/>
+              </a:rPr>
+              <a:t>•</a:t>
+            </a:r>
+          </a:p>
+        </p:txBody>
+      </p:sp>
+      <p:sp>
+        <p:nvSpPr>
+          <p:cNvPr id="16" name="TextBox 15"/>
+          <p:cNvSpPr txBox="1"/>
+          <p:nvPr/>
+        </p:nvSpPr>
+        <p:spPr>
+          <a:xfrm>
+            <a:off x="1143000" y="3803904"/>
+            <a:ext cx="2761488" cy="438912"/>
+          </a:xfrm>
+          <a:prstGeom prst="rect">
+            <a:avLst/>
+          </a:prstGeom>
+          <a:noFill/>
+        </p:spPr>
+        <p:txBody>
+          <a:bodyPr wrap="square" anchor="t">
+            <a:spAutoFit/>
+          </a:bodyPr>
+          <a:lstStyle/>
+          <a:p>
+            <a:pPr algn="l"/>
+            <a:r>
+              <a:rPr sz="1300" b="0">
+                <a:solidFill>
+                  <a:srgbClr val="62584D"/>
+                </a:solidFill>
+                <a:latin typeface="Aptos"/>
+              </a:rPr>
+              <a:t>Mots-clés et créneaux mis sous un format stable.</a:t>
+            </a:r>
+          </a:p>
+        </p:txBody>
+      </p:sp>
+      <p:sp>
+        <p:nvSpPr>
+          <p:cNvPr id="17" name="Rounded Rectangle 16"/>
           <p:cNvSpPr/>
           <p:nvPr/>
         </p:nvSpPr>
         <p:spPr>
           <a:xfrm>
-            <a:off x="2926080" y="2423160"/>
-            <a:ext cx="1874519" cy="1417320"/>
+            <a:off x="4343400" y="1874519"/>
+            <a:ext cx="3520440" cy="3566160"/>
           </a:xfrm>
           <a:prstGeom prst="roundRect">
             <a:avLst>
@@ -10197,27 +10337,27 @@
       </p:sp>
       <p:sp>
         <p:nvSpPr>
-          <p:cNvPr id="14" name="TextBox 13"/>
-          <p:cNvSpPr txBox="1"/>
-          <p:nvPr/>
-        </p:nvSpPr>
-        <p:spPr>
-          <a:xfrm>
-            <a:off x="3063240" y="2724912"/>
-            <a:ext cx="1600200" cy="237744"/>
-          </a:xfrm>
-          <a:prstGeom prst="rect">
-            <a:avLst/>
-          </a:prstGeom>
-          <a:noFill/>
-        </p:spPr>
-        <p:txBody>
-          <a:bodyPr wrap="square" anchor="t">
-            <a:spAutoFit/>
-          </a:bodyPr>
-          <a:lstStyle/>
-          <a:p>
-            <a:pPr algn="ctr"/>
+          <p:cNvPr id="18" name="TextBox 17"/>
+          <p:cNvSpPr txBox="1"/>
+          <p:nvPr/>
+        </p:nvSpPr>
+        <p:spPr>
+          <a:xfrm>
+            <a:off x="4599432" y="2093976"/>
+            <a:ext cx="3008376" cy="320040"/>
+          </a:xfrm>
+          <a:prstGeom prst="rect">
+            <a:avLst/>
+          </a:prstGeom>
+          <a:noFill/>
+        </p:spPr>
+        <p:txBody>
+          <a:bodyPr wrap="square" anchor="t">
+            <a:spAutoFit/>
+          </a:bodyPr>
+          <a:lstStyle/>
+          <a:p>
+            <a:pPr algn="l"/>
             <a:r>
               <a:rPr sz="1600" b="1">
                 <a:solidFill>
@@ -10225,91 +10365,231 @@
                 </a:solidFill>
                 <a:latin typeface="Aptos"/>
               </a:rPr>
-              <a:t>Nettoyage</a:t>
-            </a:r>
-          </a:p>
-        </p:txBody>
-      </p:sp>
-      <p:sp>
-        <p:nvSpPr>
-          <p:cNvPr id="15" name="TextBox 14"/>
-          <p:cNvSpPr txBox="1"/>
-          <p:nvPr/>
-        </p:nvSpPr>
-        <p:spPr>
-          <a:xfrm>
-            <a:off x="3063240" y="3145536"/>
-            <a:ext cx="1600200" cy="201168"/>
-          </a:xfrm>
-          <a:prstGeom prst="rect">
-            <a:avLst/>
-          </a:prstGeom>
-          <a:noFill/>
-        </p:spPr>
-        <p:txBody>
-          <a:bodyPr wrap="square" anchor="t">
-            <a:spAutoFit/>
-          </a:bodyPr>
-          <a:lstStyle/>
-          <a:p>
-            <a:pPr algn="ctr"/>
-            <a:r>
-              <a:rPr sz="1100" b="0">
+              <a:t>Événements dédupliqués</a:t>
+            </a:r>
+          </a:p>
+        </p:txBody>
+      </p:sp>
+      <p:sp>
+        <p:nvSpPr>
+          <p:cNvPr id="19" name="TextBox 18"/>
+          <p:cNvSpPr txBox="1"/>
+          <p:nvPr/>
+        </p:nvSpPr>
+        <p:spPr>
+          <a:xfrm>
+            <a:off x="4617720" y="2560320"/>
+            <a:ext cx="164592" cy="210312"/>
+          </a:xfrm>
+          <a:prstGeom prst="rect">
+            <a:avLst/>
+          </a:prstGeom>
+          <a:noFill/>
+        </p:spPr>
+        <p:txBody>
+          <a:bodyPr wrap="square" anchor="t">
+            <a:spAutoFit/>
+          </a:bodyPr>
+          <a:lstStyle/>
+          <a:p>
+            <a:pPr algn="l"/>
+            <a:r>
+              <a:rPr sz="1600" b="1">
+                <a:solidFill>
+                  <a:srgbClr val="235F45"/>
+                </a:solidFill>
+                <a:latin typeface="Aptos"/>
+              </a:rPr>
+              <a:t>•</a:t>
+            </a:r>
+          </a:p>
+        </p:txBody>
+      </p:sp>
+      <p:sp>
+        <p:nvSpPr>
+          <p:cNvPr id="20" name="TextBox 19"/>
+          <p:cNvSpPr txBox="1"/>
+          <p:nvPr/>
+        </p:nvSpPr>
+        <p:spPr>
+          <a:xfrm>
+            <a:off x="4846320" y="2560320"/>
+            <a:ext cx="2761488" cy="438912"/>
+          </a:xfrm>
+          <a:prstGeom prst="rect">
+            <a:avLst/>
+          </a:prstGeom>
+          <a:noFill/>
+        </p:spPr>
+        <p:txBody>
+          <a:bodyPr wrap="square" anchor="t">
+            <a:spAutoFit/>
+          </a:bodyPr>
+          <a:lstStyle/>
+          <a:p>
+            <a:pPr algn="l"/>
+            <a:r>
+              <a:rPr sz="1300" b="0">
                 <a:solidFill>
                   <a:srgbClr val="62584D"/>
                 </a:solidFill>
                 <a:latin typeface="Aptos"/>
               </a:rPr>
-              <a:t>normalisation</a:t>
-            </a:r>
-          </a:p>
-        </p:txBody>
-      </p:sp>
-      <p:sp>
-        <p:nvSpPr>
-          <p:cNvPr id="16" name="TextBox 15"/>
-          <p:cNvSpPr txBox="1"/>
-          <p:nvPr/>
-        </p:nvSpPr>
-        <p:spPr>
-          <a:xfrm>
-            <a:off x="4828032" y="2907792"/>
-            <a:ext cx="310896" cy="237744"/>
-          </a:xfrm>
-          <a:prstGeom prst="rect">
-            <a:avLst/>
-          </a:prstGeom>
-          <a:noFill/>
-        </p:spPr>
-        <p:txBody>
-          <a:bodyPr wrap="square" anchor="t">
-            <a:spAutoFit/>
-          </a:bodyPr>
-          <a:lstStyle/>
-          <a:p>
-            <a:pPr algn="ctr"/>
-            <a:r>
-              <a:rPr sz="1900" b="1">
-                <a:solidFill>
-                  <a:srgbClr val="B74F2A"/>
-                </a:solidFill>
-                <a:latin typeface="Aptos"/>
-              </a:rPr>
-              <a:t>→</a:t>
-            </a:r>
-          </a:p>
-        </p:txBody>
-      </p:sp>
-      <p:sp>
-        <p:nvSpPr>
-          <p:cNvPr id="17" name="Rounded Rectangle 16"/>
+              <a:t>Identifiant stable : openagenda:&lt;uid&gt;.</a:t>
+            </a:r>
+          </a:p>
+        </p:txBody>
+      </p:sp>
+      <p:sp>
+        <p:nvSpPr>
+          <p:cNvPr id="21" name="TextBox 20"/>
+          <p:cNvSpPr txBox="1"/>
+          <p:nvPr/>
+        </p:nvSpPr>
+        <p:spPr>
+          <a:xfrm>
+            <a:off x="4617720" y="3182112"/>
+            <a:ext cx="164592" cy="210312"/>
+          </a:xfrm>
+          <a:prstGeom prst="rect">
+            <a:avLst/>
+          </a:prstGeom>
+          <a:noFill/>
+        </p:spPr>
+        <p:txBody>
+          <a:bodyPr wrap="square" anchor="t">
+            <a:spAutoFit/>
+          </a:bodyPr>
+          <a:lstStyle/>
+          <a:p>
+            <a:pPr algn="l"/>
+            <a:r>
+              <a:rPr sz="1600" b="1">
+                <a:solidFill>
+                  <a:srgbClr val="235F45"/>
+                </a:solidFill>
+                <a:latin typeface="Aptos"/>
+              </a:rPr>
+              <a:t>•</a:t>
+            </a:r>
+          </a:p>
+        </p:txBody>
+      </p:sp>
+      <p:sp>
+        <p:nvSpPr>
+          <p:cNvPr id="22" name="TextBox 21"/>
+          <p:cNvSpPr txBox="1"/>
+          <p:nvPr/>
+        </p:nvSpPr>
+        <p:spPr>
+          <a:xfrm>
+            <a:off x="4846320" y="3182112"/>
+            <a:ext cx="2761488" cy="438912"/>
+          </a:xfrm>
+          <a:prstGeom prst="rect">
+            <a:avLst/>
+          </a:prstGeom>
+          <a:noFill/>
+        </p:spPr>
+        <p:txBody>
+          <a:bodyPr wrap="square" anchor="t">
+            <a:spAutoFit/>
+          </a:bodyPr>
+          <a:lstStyle/>
+          <a:p>
+            <a:pPr algn="l"/>
+            <a:r>
+              <a:rPr sz="1300" b="0">
+                <a:solidFill>
+                  <a:srgbClr val="62584D"/>
+                </a:solidFill>
+                <a:latin typeface="Aptos"/>
+              </a:rPr>
+              <a:t>Même événement présent dans plusieurs agendas : une seule fiche.</a:t>
+            </a:r>
+          </a:p>
+        </p:txBody>
+      </p:sp>
+      <p:sp>
+        <p:nvSpPr>
+          <p:cNvPr id="23" name="TextBox 22"/>
+          <p:cNvSpPr txBox="1"/>
+          <p:nvPr/>
+        </p:nvSpPr>
+        <p:spPr>
+          <a:xfrm>
+            <a:off x="4617720" y="3803904"/>
+            <a:ext cx="164592" cy="210312"/>
+          </a:xfrm>
+          <a:prstGeom prst="rect">
+            <a:avLst/>
+          </a:prstGeom>
+          <a:noFill/>
+        </p:spPr>
+        <p:txBody>
+          <a:bodyPr wrap="square" anchor="t">
+            <a:spAutoFit/>
+          </a:bodyPr>
+          <a:lstStyle/>
+          <a:p>
+            <a:pPr algn="l"/>
+            <a:r>
+              <a:rPr sz="1600" b="1">
+                <a:solidFill>
+                  <a:srgbClr val="235F45"/>
+                </a:solidFill>
+                <a:latin typeface="Aptos"/>
+              </a:rPr>
+              <a:t>•</a:t>
+            </a:r>
+          </a:p>
+        </p:txBody>
+      </p:sp>
+      <p:sp>
+        <p:nvSpPr>
+          <p:cNvPr id="24" name="TextBox 23"/>
+          <p:cNvSpPr txBox="1"/>
+          <p:nvPr/>
+        </p:nvSpPr>
+        <p:spPr>
+          <a:xfrm>
+            <a:off x="4846320" y="3803904"/>
+            <a:ext cx="2761488" cy="438912"/>
+          </a:xfrm>
+          <a:prstGeom prst="rect">
+            <a:avLst/>
+          </a:prstGeom>
+          <a:noFill/>
+        </p:spPr>
+        <p:txBody>
+          <a:bodyPr wrap="square" anchor="t">
+            <a:spAutoFit/>
+          </a:bodyPr>
+          <a:lstStyle/>
+          <a:p>
+            <a:pPr algn="l"/>
+            <a:r>
+              <a:rPr sz="1300" b="0">
+                <a:solidFill>
+                  <a:srgbClr val="62584D"/>
+                </a:solidFill>
+                <a:latin typeface="Aptos"/>
+              </a:rPr>
+              <a:t>Les agendas sources restent conservés.</a:t>
+            </a:r>
+          </a:p>
+        </p:txBody>
+      </p:sp>
+      <p:sp>
+        <p:nvSpPr>
+          <p:cNvPr id="25" name="Rounded Rectangle 24"/>
           <p:cNvSpPr/>
           <p:nvPr/>
         </p:nvSpPr>
         <p:spPr>
           <a:xfrm>
-            <a:off x="5212080" y="2423160"/>
-            <a:ext cx="1874519" cy="1417320"/>
+            <a:off x="8046720" y="1874519"/>
+            <a:ext cx="3520440" cy="3566160"/>
           </a:xfrm>
           <a:prstGeom prst="roundRect">
             <a:avLst>
@@ -10349,27 +10629,27 @@
       </p:sp>
       <p:sp>
         <p:nvSpPr>
-          <p:cNvPr id="18" name="TextBox 17"/>
-          <p:cNvSpPr txBox="1"/>
-          <p:nvPr/>
-        </p:nvSpPr>
-        <p:spPr>
-          <a:xfrm>
-            <a:off x="5349240" y="2724912"/>
-            <a:ext cx="1600200" cy="237744"/>
-          </a:xfrm>
-          <a:prstGeom prst="rect">
-            <a:avLst/>
-          </a:prstGeom>
-          <a:noFill/>
-        </p:spPr>
-        <p:txBody>
-          <a:bodyPr wrap="square" anchor="t">
-            <a:spAutoFit/>
-          </a:bodyPr>
-          <a:lstStyle/>
-          <a:p>
-            <a:pPr algn="ctr"/>
+          <p:cNvPr id="26" name="TextBox 25"/>
+          <p:cNvSpPr txBox="1"/>
+          <p:nvPr/>
+        </p:nvSpPr>
+        <p:spPr>
+          <a:xfrm>
+            <a:off x="8302752" y="2093976"/>
+            <a:ext cx="3008376" cy="320040"/>
+          </a:xfrm>
+          <a:prstGeom prst="rect">
+            <a:avLst/>
+          </a:prstGeom>
+          <a:noFill/>
+        </p:spPr>
+        <p:txBody>
+          <a:bodyPr wrap="square" anchor="t">
+            <a:spAutoFit/>
+          </a:bodyPr>
+          <a:lstStyle/>
+          <a:p>
+            <a:pPr algn="l"/>
             <a:r>
               <a:rPr sz="1600" b="1">
                 <a:solidFill>
@@ -10377,428 +10657,217 @@
                 </a:solidFill>
                 <a:latin typeface="Aptos"/>
               </a:rPr>
-              <a:t>Découpage</a:t>
-            </a:r>
-          </a:p>
-        </p:txBody>
-      </p:sp>
-      <p:sp>
-        <p:nvSpPr>
-          <p:cNvPr id="19" name="TextBox 18"/>
-          <p:cNvSpPr txBox="1"/>
-          <p:nvPr/>
-        </p:nvSpPr>
-        <p:spPr>
-          <a:xfrm>
-            <a:off x="5349240" y="3145536"/>
-            <a:ext cx="1600200" cy="201168"/>
-          </a:xfrm>
-          <a:prstGeom prst="rect">
-            <a:avLst/>
-          </a:prstGeom>
-          <a:noFill/>
-        </p:spPr>
-        <p:txBody>
-          <a:bodyPr wrap="square" anchor="t">
-            <a:spAutoFit/>
-          </a:bodyPr>
-          <a:lstStyle/>
-          <a:p>
-            <a:pPr algn="ctr"/>
-            <a:r>
-              <a:rPr sz="1100" b="0">
+              <a:t>Champ document</a:t>
+            </a:r>
+          </a:p>
+        </p:txBody>
+      </p:sp>
+      <p:sp>
+        <p:nvSpPr>
+          <p:cNvPr id="27" name="TextBox 26"/>
+          <p:cNvSpPr txBox="1"/>
+          <p:nvPr/>
+        </p:nvSpPr>
+        <p:spPr>
+          <a:xfrm>
+            <a:off x="8321040" y="2560320"/>
+            <a:ext cx="164592" cy="210312"/>
+          </a:xfrm>
+          <a:prstGeom prst="rect">
+            <a:avLst/>
+          </a:prstGeom>
+          <a:noFill/>
+        </p:spPr>
+        <p:txBody>
+          <a:bodyPr wrap="square" anchor="t">
+            <a:spAutoFit/>
+          </a:bodyPr>
+          <a:lstStyle/>
+          <a:p>
+            <a:pPr algn="l"/>
+            <a:r>
+              <a:rPr sz="1600" b="1">
+                <a:solidFill>
+                  <a:srgbClr val="B74F2A"/>
+                </a:solidFill>
+                <a:latin typeface="Aptos"/>
+              </a:rPr>
+              <a:t>•</a:t>
+            </a:r>
+          </a:p>
+        </p:txBody>
+      </p:sp>
+      <p:sp>
+        <p:nvSpPr>
+          <p:cNvPr id="28" name="TextBox 27"/>
+          <p:cNvSpPr txBox="1"/>
+          <p:nvPr/>
+        </p:nvSpPr>
+        <p:spPr>
+          <a:xfrm>
+            <a:off x="8549640" y="2560320"/>
+            <a:ext cx="2761488" cy="438912"/>
+          </a:xfrm>
+          <a:prstGeom prst="rect">
+            <a:avLst/>
+          </a:prstGeom>
+          <a:noFill/>
+        </p:spPr>
+        <p:txBody>
+          <a:bodyPr wrap="square" anchor="t">
+            <a:spAutoFit/>
+          </a:bodyPr>
+          <a:lstStyle/>
+          <a:p>
+            <a:pPr algn="l"/>
+            <a:r>
+              <a:rPr sz="1300" b="0">
                 <a:solidFill>
                   <a:srgbClr val="62584D"/>
                 </a:solidFill>
                 <a:latin typeface="Aptos"/>
               </a:rPr>
-              <a:t>chunks</a:t>
-            </a:r>
-          </a:p>
-        </p:txBody>
-      </p:sp>
-      <p:sp>
-        <p:nvSpPr>
-          <p:cNvPr id="20" name="TextBox 19"/>
-          <p:cNvSpPr txBox="1"/>
-          <p:nvPr/>
-        </p:nvSpPr>
-        <p:spPr>
-          <a:xfrm>
-            <a:off x="7114032" y="2907792"/>
-            <a:ext cx="310896" cy="237744"/>
-          </a:xfrm>
-          <a:prstGeom prst="rect">
-            <a:avLst/>
-          </a:prstGeom>
-          <a:noFill/>
-        </p:spPr>
-        <p:txBody>
-          <a:bodyPr wrap="square" anchor="t">
-            <a:spAutoFit/>
-          </a:bodyPr>
-          <a:lstStyle/>
-          <a:p>
-            <a:pPr algn="ctr"/>
-            <a:r>
-              <a:rPr sz="1900" b="1">
+              <a:t>Titre, description, types, dates et lieu regroupés.</a:t>
+            </a:r>
+          </a:p>
+        </p:txBody>
+      </p:sp>
+      <p:sp>
+        <p:nvSpPr>
+          <p:cNvPr id="29" name="TextBox 28"/>
+          <p:cNvSpPr txBox="1"/>
+          <p:nvPr/>
+        </p:nvSpPr>
+        <p:spPr>
+          <a:xfrm>
+            <a:off x="8321040" y="3182112"/>
+            <a:ext cx="164592" cy="210312"/>
+          </a:xfrm>
+          <a:prstGeom prst="rect">
+            <a:avLst/>
+          </a:prstGeom>
+          <a:noFill/>
+        </p:spPr>
+        <p:txBody>
+          <a:bodyPr wrap="square" anchor="t">
+            <a:spAutoFit/>
+          </a:bodyPr>
+          <a:lstStyle/>
+          <a:p>
+            <a:pPr algn="l"/>
+            <a:r>
+              <a:rPr sz="1600" b="1">
                 <a:solidFill>
                   <a:srgbClr val="B74F2A"/>
                 </a:solidFill>
                 <a:latin typeface="Aptos"/>
               </a:rPr>
-              <a:t>→</a:t>
-            </a:r>
-          </a:p>
-        </p:txBody>
-      </p:sp>
-      <p:sp>
-        <p:nvSpPr>
-          <p:cNvPr id="21" name="Rounded Rectangle 20"/>
-          <p:cNvSpPr/>
-          <p:nvPr/>
-        </p:nvSpPr>
-        <p:spPr>
-          <a:xfrm>
-            <a:off x="7498079" y="2423160"/>
-            <a:ext cx="1874519" cy="1417320"/>
-          </a:xfrm>
-          <a:prstGeom prst="roundRect">
-            <a:avLst>
-              <a:gd name="adj" fmla="val 12000"/>
-            </a:avLst>
-          </a:prstGeom>
-          <a:solidFill>
-            <a:srgbClr val="FFFAF2"/>
-          </a:solidFill>
-          <a:ln>
-            <a:solidFill>
-              <a:srgbClr val="E1D5C7"/>
-            </a:solidFill>
-          </a:ln>
-        </p:spPr>
-        <p:style>
-          <a:lnRef idx="1">
-            <a:schemeClr val="accent1"/>
-          </a:lnRef>
-          <a:fillRef idx="3">
-            <a:schemeClr val="accent1"/>
-          </a:fillRef>
-          <a:effectRef idx="2">
-            <a:schemeClr val="accent1"/>
-          </a:effectRef>
-          <a:fontRef idx="minor">
-            <a:schemeClr val="lt1"/>
-          </a:fontRef>
-        </p:style>
-        <p:txBody>
-          <a:bodyPr rtlCol="0" anchor="ctr"/>
-          <a:lstStyle/>
-          <a:p>
-            <a:pPr algn="ctr"/>
-          </a:p>
-        </p:txBody>
-      </p:sp>
-      <p:sp>
-        <p:nvSpPr>
-          <p:cNvPr id="22" name="TextBox 21"/>
-          <p:cNvSpPr txBox="1"/>
-          <p:nvPr/>
-        </p:nvSpPr>
-        <p:spPr>
-          <a:xfrm>
-            <a:off x="7635240" y="2724912"/>
-            <a:ext cx="1600200" cy="237744"/>
-          </a:xfrm>
-          <a:prstGeom prst="rect">
-            <a:avLst/>
-          </a:prstGeom>
-          <a:noFill/>
-        </p:spPr>
-        <p:txBody>
-          <a:bodyPr wrap="square" anchor="t">
-            <a:spAutoFit/>
-          </a:bodyPr>
-          <a:lstStyle/>
-          <a:p>
-            <a:pPr algn="ctr"/>
+              <a:t>•</a:t>
+            </a:r>
+          </a:p>
+        </p:txBody>
+      </p:sp>
+      <p:sp>
+        <p:nvSpPr>
+          <p:cNvPr id="30" name="TextBox 29"/>
+          <p:cNvSpPr txBox="1"/>
+          <p:nvPr/>
+        </p:nvSpPr>
+        <p:spPr>
+          <a:xfrm>
+            <a:off x="8549640" y="3182112"/>
+            <a:ext cx="2761488" cy="438912"/>
+          </a:xfrm>
+          <a:prstGeom prst="rect">
+            <a:avLst/>
+          </a:prstGeom>
+          <a:noFill/>
+        </p:spPr>
+        <p:txBody>
+          <a:bodyPr wrap="square" anchor="t">
+            <a:spAutoFit/>
+          </a:bodyPr>
+          <a:lstStyle/>
+          <a:p>
+            <a:pPr algn="l"/>
+            <a:r>
+              <a:rPr sz="1300" b="0">
+                <a:solidFill>
+                  <a:srgbClr val="62584D"/>
+                </a:solidFill>
+                <a:latin typeface="Aptos"/>
+              </a:rPr>
+              <a:t>Le texte représente aussi les critères « où ? » et « quand ? ».</a:t>
+            </a:r>
+          </a:p>
+        </p:txBody>
+      </p:sp>
+      <p:sp>
+        <p:nvSpPr>
+          <p:cNvPr id="31" name="TextBox 30"/>
+          <p:cNvSpPr txBox="1"/>
+          <p:nvPr/>
+        </p:nvSpPr>
+        <p:spPr>
+          <a:xfrm>
+            <a:off x="8321040" y="3803904"/>
+            <a:ext cx="164592" cy="210312"/>
+          </a:xfrm>
+          <a:prstGeom prst="rect">
+            <a:avLst/>
+          </a:prstGeom>
+          <a:noFill/>
+        </p:spPr>
+        <p:txBody>
+          <a:bodyPr wrap="square" anchor="t">
+            <a:spAutoFit/>
+          </a:bodyPr>
+          <a:lstStyle/>
+          <a:p>
+            <a:pPr algn="l"/>
             <a:r>
               <a:rPr sz="1600" b="1">
                 <a:solidFill>
-                  <a:srgbClr val="1F1B16"/>
-                </a:solidFill>
-                <a:latin typeface="Aptos"/>
-              </a:rPr>
-              <a:t>Embeddings</a:t>
-            </a:r>
-          </a:p>
-        </p:txBody>
-      </p:sp>
-      <p:sp>
-        <p:nvSpPr>
-          <p:cNvPr id="23" name="TextBox 22"/>
-          <p:cNvSpPr txBox="1"/>
-          <p:nvPr/>
-        </p:nvSpPr>
-        <p:spPr>
-          <a:xfrm>
-            <a:off x="7635240" y="3145536"/>
-            <a:ext cx="1600200" cy="201168"/>
-          </a:xfrm>
-          <a:prstGeom prst="rect">
-            <a:avLst/>
-          </a:prstGeom>
-          <a:noFill/>
-        </p:spPr>
-        <p:txBody>
-          <a:bodyPr wrap="square" anchor="t">
-            <a:spAutoFit/>
-          </a:bodyPr>
-          <a:lstStyle/>
-          <a:p>
-            <a:pPr algn="ctr"/>
-            <a:r>
-              <a:rPr sz="1100" b="0">
+                  <a:srgbClr val="B74F2A"/>
+                </a:solidFill>
+                <a:latin typeface="Aptos"/>
+              </a:rPr>
+              <a:t>•</a:t>
+            </a:r>
+          </a:p>
+        </p:txBody>
+      </p:sp>
+      <p:sp>
+        <p:nvSpPr>
+          <p:cNvPr id="32" name="TextBox 31"/>
+          <p:cNvSpPr txBox="1"/>
+          <p:nvPr/>
+        </p:nvSpPr>
+        <p:spPr>
+          <a:xfrm>
+            <a:off x="8549640" y="3803904"/>
+            <a:ext cx="2761488" cy="438912"/>
+          </a:xfrm>
+          <a:prstGeom prst="rect">
+            <a:avLst/>
+          </a:prstGeom>
+          <a:noFill/>
+        </p:spPr>
+        <p:txBody>
+          <a:bodyPr wrap="square" anchor="t">
+            <a:spAutoFit/>
+          </a:bodyPr>
+          <a:lstStyle/>
+          <a:p>
+            <a:pPr algn="l"/>
+            <a:r>
+              <a:rPr sz="1300" b="0">
                 <a:solidFill>
                   <a:srgbClr val="62584D"/>
                 </a:solidFill>
                 <a:latin typeface="Aptos"/>
               </a:rPr>
-              <a:t>mistral-embed</a:t>
-            </a:r>
-          </a:p>
-        </p:txBody>
-      </p:sp>
-      <p:sp>
-        <p:nvSpPr>
-          <p:cNvPr id="24" name="TextBox 23"/>
-          <p:cNvSpPr txBox="1"/>
-          <p:nvPr/>
-        </p:nvSpPr>
-        <p:spPr>
-          <a:xfrm>
-            <a:off x="9400032" y="2907792"/>
-            <a:ext cx="310896" cy="237744"/>
-          </a:xfrm>
-          <a:prstGeom prst="rect">
-            <a:avLst/>
-          </a:prstGeom>
-          <a:noFill/>
-        </p:spPr>
-        <p:txBody>
-          <a:bodyPr wrap="square" anchor="t">
-            <a:spAutoFit/>
-          </a:bodyPr>
-          <a:lstStyle/>
-          <a:p>
-            <a:pPr algn="ctr"/>
-            <a:r>
-              <a:rPr sz="1900" b="1">
-                <a:solidFill>
-                  <a:srgbClr val="B74F2A"/>
-                </a:solidFill>
-                <a:latin typeface="Aptos"/>
-              </a:rPr>
-              <a:t>→</a:t>
-            </a:r>
-          </a:p>
-        </p:txBody>
-      </p:sp>
-      <p:sp>
-        <p:nvSpPr>
-          <p:cNvPr id="25" name="Rounded Rectangle 24"/>
-          <p:cNvSpPr/>
-          <p:nvPr/>
-        </p:nvSpPr>
-        <p:spPr>
-          <a:xfrm>
-            <a:off x="9784080" y="2423160"/>
-            <a:ext cx="1874519" cy="1417320"/>
-          </a:xfrm>
-          <a:prstGeom prst="roundRect">
-            <a:avLst>
-              <a:gd name="adj" fmla="val 12000"/>
-            </a:avLst>
-          </a:prstGeom>
-          <a:solidFill>
-            <a:srgbClr val="FFFAF2"/>
-          </a:solidFill>
-          <a:ln>
-            <a:solidFill>
-              <a:srgbClr val="E1D5C7"/>
-            </a:solidFill>
-          </a:ln>
-        </p:spPr>
-        <p:style>
-          <a:lnRef idx="1">
-            <a:schemeClr val="accent1"/>
-          </a:lnRef>
-          <a:fillRef idx="3">
-            <a:schemeClr val="accent1"/>
-          </a:fillRef>
-          <a:effectRef idx="2">
-            <a:schemeClr val="accent1"/>
-          </a:effectRef>
-          <a:fontRef idx="minor">
-            <a:schemeClr val="lt1"/>
-          </a:fontRef>
-        </p:style>
-        <p:txBody>
-          <a:bodyPr rtlCol="0" anchor="ctr"/>
-          <a:lstStyle/>
-          <a:p>
-            <a:pPr algn="ctr"/>
-          </a:p>
-        </p:txBody>
-      </p:sp>
-      <p:sp>
-        <p:nvSpPr>
-          <p:cNvPr id="26" name="TextBox 25"/>
-          <p:cNvSpPr txBox="1"/>
-          <p:nvPr/>
-        </p:nvSpPr>
-        <p:spPr>
-          <a:xfrm>
-            <a:off x="9921240" y="2724912"/>
-            <a:ext cx="1600200" cy="237744"/>
-          </a:xfrm>
-          <a:prstGeom prst="rect">
-            <a:avLst/>
-          </a:prstGeom>
-          <a:noFill/>
-        </p:spPr>
-        <p:txBody>
-          <a:bodyPr wrap="square" anchor="t">
-            <a:spAutoFit/>
-          </a:bodyPr>
-          <a:lstStyle/>
-          <a:p>
-            <a:pPr algn="ctr"/>
-            <a:r>
-              <a:rPr sz="1600" b="1">
-                <a:solidFill>
-                  <a:srgbClr val="1F1B16"/>
-                </a:solidFill>
-                <a:latin typeface="Aptos"/>
-              </a:rPr>
-              <a:t>Index</a:t>
-            </a:r>
-          </a:p>
-        </p:txBody>
-      </p:sp>
-      <p:sp>
-        <p:nvSpPr>
-          <p:cNvPr id="27" name="TextBox 26"/>
-          <p:cNvSpPr txBox="1"/>
-          <p:nvPr/>
-        </p:nvSpPr>
-        <p:spPr>
-          <a:xfrm>
-            <a:off x="9921240" y="3145536"/>
-            <a:ext cx="1600200" cy="201168"/>
-          </a:xfrm>
-          <a:prstGeom prst="rect">
-            <a:avLst/>
-          </a:prstGeom>
-          <a:noFill/>
-        </p:spPr>
-        <p:txBody>
-          <a:bodyPr wrap="square" anchor="t">
-            <a:spAutoFit/>
-          </a:bodyPr>
-          <a:lstStyle/>
-          <a:p>
-            <a:pPr algn="ctr"/>
-            <a:r>
-              <a:rPr sz="1100" b="0">
-                <a:solidFill>
-                  <a:srgbClr val="62584D"/>
-                </a:solidFill>
-                <a:latin typeface="Aptos"/>
-              </a:rPr>
-              <a:t>FAISS</a:t>
-            </a:r>
-          </a:p>
-        </p:txBody>
-      </p:sp>
-      <p:sp>
-        <p:nvSpPr>
-          <p:cNvPr id="28" name="Rounded Rectangle 27"/>
-          <p:cNvSpPr/>
-          <p:nvPr/>
-        </p:nvSpPr>
-        <p:spPr>
-          <a:xfrm>
-            <a:off x="1234440" y="4572000"/>
-            <a:ext cx="9692640" cy="512064"/>
-          </a:xfrm>
-          <a:prstGeom prst="roundRect">
-            <a:avLst>
-              <a:gd name="adj" fmla="val 12000"/>
-            </a:avLst>
-          </a:prstGeom>
-          <a:solidFill>
-            <a:srgbClr val="F3C7AD"/>
-          </a:solidFill>
-          <a:ln>
-            <a:solidFill>
-              <a:srgbClr val="F3C7AD"/>
-            </a:solidFill>
-          </a:ln>
-        </p:spPr>
-        <p:style>
-          <a:lnRef idx="1">
-            <a:schemeClr val="accent1"/>
-          </a:lnRef>
-          <a:fillRef idx="3">
-            <a:schemeClr val="accent1"/>
-          </a:fillRef>
-          <a:effectRef idx="2">
-            <a:schemeClr val="accent1"/>
-          </a:effectRef>
-          <a:fontRef idx="minor">
-            <a:schemeClr val="lt1"/>
-          </a:fontRef>
-        </p:style>
-        <p:txBody>
-          <a:bodyPr rtlCol="0" anchor="ctr"/>
-          <a:lstStyle/>
-          <a:p>
-            <a:pPr algn="ctr"/>
-          </a:p>
-        </p:txBody>
-      </p:sp>
-      <p:sp>
-        <p:nvSpPr>
-          <p:cNvPr id="29" name="TextBox 28"/>
-          <p:cNvSpPr txBox="1"/>
-          <p:nvPr/>
-        </p:nvSpPr>
-        <p:spPr>
-          <a:xfrm>
-            <a:off x="1417320" y="4718304"/>
-            <a:ext cx="9281160" cy="182880"/>
-          </a:xfrm>
-          <a:prstGeom prst="rect">
-            <a:avLst/>
-          </a:prstGeom>
-          <a:noFill/>
-        </p:spPr>
-        <p:txBody>
-          <a:bodyPr wrap="square" anchor="t">
-            <a:spAutoFit/>
-          </a:bodyPr>
-          <a:lstStyle/>
-          <a:p>
-            <a:pPr algn="ctr"/>
-            <a:r>
-              <a:rPr sz="1300" b="1">
-                <a:solidFill>
-                  <a:srgbClr val="7F2F16"/>
-                </a:solidFill>
-                <a:latin typeface="Aptos"/>
-              </a:rPr>
-              <a:t>Résultat : une base de recherche et les informations nécessaires pour retrouver chaque événement.</a:t>
+              <a:t>C'est la base des chunks et des embeddings.</a:t>
             </a:r>
           </a:p>
         </p:txBody>
@@ -11054,7 +11123,7 @@
                 </a:solidFill>
                 <a:latin typeface="Aptos Display"/>
               </a:rPr>
-              <a:t>Que se passe-t-il quand on pose une question ?</a:t>
+              <a:t>Découper puis vectoriser</a:t>
             </a:r>
           </a:p>
         </p:txBody>
@@ -11089,7 +11158,7 @@
                 </a:solidFill>
                 <a:latin typeface="Aptos"/>
               </a:rPr>
-              <a:t>La réponse s'appuie sur les événements réellement retrouvés dans la base.</a:t>
+              <a:t>Préparer des unités de recherche précises, sans perdre le contexte des fiches événementielles.</a:t>
             </a:r>
           </a:p>
         </p:txBody>
@@ -11102,8 +11171,8 @@
         </p:nvSpPr>
         <p:spPr>
           <a:xfrm>
-            <a:off x="438912" y="2240280"/>
-            <a:ext cx="1965960" cy="1691640"/>
+            <a:off x="640080" y="1874519"/>
+            <a:ext cx="3520440" cy="3566160"/>
           </a:xfrm>
           <a:prstGeom prst="roundRect">
             <a:avLst>
@@ -11111,11 +11180,11 @@
             </a:avLst>
           </a:prstGeom>
           <a:solidFill>
-            <a:srgbClr val="B74F2A"/>
+            <a:srgbClr val="FFFAF2"/>
           </a:solidFill>
           <a:ln>
             <a:solidFill>
-              <a:srgbClr val="B74F2A"/>
+              <a:srgbClr val="E1D5C7"/>
             </a:solidFill>
           </a:ln>
         </p:spPr>
@@ -11149,29 +11218,29 @@
         </p:nvSpPr>
         <p:spPr>
           <a:xfrm>
-            <a:off x="585216" y="2523744"/>
-            <a:ext cx="1673352" cy="228600"/>
-          </a:xfrm>
-          <a:prstGeom prst="rect">
-            <a:avLst/>
-          </a:prstGeom>
-          <a:noFill/>
-        </p:spPr>
-        <p:txBody>
-          <a:bodyPr wrap="square" anchor="t">
-            <a:spAutoFit/>
-          </a:bodyPr>
-          <a:lstStyle/>
-          <a:p>
-            <a:pPr algn="ctr"/>
+            <a:off x="896112" y="2093976"/>
+            <a:ext cx="3008376" cy="320040"/>
+          </a:xfrm>
+          <a:prstGeom prst="rect">
+            <a:avLst/>
+          </a:prstGeom>
+          <a:noFill/>
+        </p:spPr>
+        <p:txBody>
+          <a:bodyPr wrap="square" anchor="t">
+            <a:spAutoFit/>
+          </a:bodyPr>
+          <a:lstStyle/>
+          <a:p>
+            <a:pPr algn="l"/>
             <a:r>
               <a:rPr sz="1600" b="1">
                 <a:solidFill>
-                  <a:srgbClr val="FFFFFF"/>
-                </a:solidFill>
-                <a:latin typeface="Aptos"/>
-              </a:rPr>
-              <a:t>Question</a:t>
+                  <a:srgbClr val="1F1B16"/>
+                </a:solidFill>
+                <a:latin typeface="Aptos"/>
+              </a:rPr>
+              <a:t>Chunks</a:t>
             </a:r>
           </a:p>
         </p:txBody>
@@ -11184,30 +11253,29 @@
         </p:nvSpPr>
         <p:spPr>
           <a:xfrm>
-            <a:off x="585216" y="2971800"/>
-            <a:ext cx="1673352" cy="548640"/>
-          </a:xfrm>
-          <a:prstGeom prst="rect">
-            <a:avLst/>
-          </a:prstGeom>
-          <a:noFill/>
-        </p:spPr>
-        <p:txBody>
-          <a:bodyPr wrap="square" anchor="t">
-            <a:spAutoFit/>
-          </a:bodyPr>
-          <a:lstStyle/>
-          <a:p>
-            <a:pPr algn="ctr"/>
-            <a:r>
-              <a:rPr sz="1100" b="0">
-                <a:solidFill>
-                  <a:srgbClr val="FFFFFF"/>
-                </a:solidFill>
-                <a:latin typeface="Aptos"/>
-              </a:rPr>
-              <a:t>« Une exposition gratuite
-ce week-end ? »</a:t>
+            <a:off x="914400" y="2560320"/>
+            <a:ext cx="164592" cy="210312"/>
+          </a:xfrm>
+          <a:prstGeom prst="rect">
+            <a:avLst/>
+          </a:prstGeom>
+          <a:noFill/>
+        </p:spPr>
+        <p:txBody>
+          <a:bodyPr wrap="square" anchor="t">
+            <a:spAutoFit/>
+          </a:bodyPr>
+          <a:lstStyle/>
+          <a:p>
+            <a:pPr algn="l"/>
+            <a:r>
+              <a:rPr sz="1600" b="1">
+                <a:solidFill>
+                  <a:srgbClr val="B74F2A"/>
+                </a:solidFill>
+                <a:latin typeface="Aptos"/>
+              </a:rPr>
+              <a:t>•</a:t>
             </a:r>
           </a:p>
         </p:txBody>
@@ -11220,43 +11288,183 @@
         </p:nvSpPr>
         <p:spPr>
           <a:xfrm>
-            <a:off x="2432304" y="2852928"/>
-            <a:ext cx="274320" cy="228600"/>
-          </a:xfrm>
-          <a:prstGeom prst="rect">
-            <a:avLst/>
-          </a:prstGeom>
-          <a:noFill/>
-        </p:spPr>
-        <p:txBody>
-          <a:bodyPr wrap="square" anchor="t">
-            <a:spAutoFit/>
-          </a:bodyPr>
-          <a:lstStyle/>
-          <a:p>
-            <a:pPr algn="ctr"/>
-            <a:r>
-              <a:rPr sz="1800" b="1">
-                <a:solidFill>
-                  <a:srgbClr val="7F2F16"/>
-                </a:solidFill>
-                <a:latin typeface="Aptos"/>
-              </a:rPr>
-              <a:t>→</a:t>
-            </a:r>
-          </a:p>
-        </p:txBody>
-      </p:sp>
-      <p:sp>
-        <p:nvSpPr>
-          <p:cNvPr id="13" name="Rounded Rectangle 12"/>
+            <a:off x="1143000" y="2560320"/>
+            <a:ext cx="2761488" cy="438912"/>
+          </a:xfrm>
+          <a:prstGeom prst="rect">
+            <a:avLst/>
+          </a:prstGeom>
+          <a:noFill/>
+        </p:spPr>
+        <p:txBody>
+          <a:bodyPr wrap="square" anchor="t">
+            <a:spAutoFit/>
+          </a:bodyPr>
+          <a:lstStyle/>
+          <a:p>
+            <a:pPr algn="l"/>
+            <a:r>
+              <a:rPr sz="1300" b="0">
+                <a:solidFill>
+                  <a:srgbClr val="62584D"/>
+                </a:solidFill>
+                <a:latin typeface="Aptos"/>
+              </a:rPr>
+              <a:t>800 caractères maximum par segment.</a:t>
+            </a:r>
+          </a:p>
+        </p:txBody>
+      </p:sp>
+      <p:sp>
+        <p:nvSpPr>
+          <p:cNvPr id="13" name="TextBox 12"/>
+          <p:cNvSpPr txBox="1"/>
+          <p:nvPr/>
+        </p:nvSpPr>
+        <p:spPr>
+          <a:xfrm>
+            <a:off x="914400" y="3182112"/>
+            <a:ext cx="164592" cy="210312"/>
+          </a:xfrm>
+          <a:prstGeom prst="rect">
+            <a:avLst/>
+          </a:prstGeom>
+          <a:noFill/>
+        </p:spPr>
+        <p:txBody>
+          <a:bodyPr wrap="square" anchor="t">
+            <a:spAutoFit/>
+          </a:bodyPr>
+          <a:lstStyle/>
+          <a:p>
+            <a:pPr algn="l"/>
+            <a:r>
+              <a:rPr sz="1600" b="1">
+                <a:solidFill>
+                  <a:srgbClr val="B74F2A"/>
+                </a:solidFill>
+                <a:latin typeface="Aptos"/>
+              </a:rPr>
+              <a:t>•</a:t>
+            </a:r>
+          </a:p>
+        </p:txBody>
+      </p:sp>
+      <p:sp>
+        <p:nvSpPr>
+          <p:cNvPr id="14" name="TextBox 13"/>
+          <p:cNvSpPr txBox="1"/>
+          <p:nvPr/>
+        </p:nvSpPr>
+        <p:spPr>
+          <a:xfrm>
+            <a:off x="1143000" y="3182112"/>
+            <a:ext cx="2761488" cy="438912"/>
+          </a:xfrm>
+          <a:prstGeom prst="rect">
+            <a:avLst/>
+          </a:prstGeom>
+          <a:noFill/>
+        </p:spPr>
+        <p:txBody>
+          <a:bodyPr wrap="square" anchor="t">
+            <a:spAutoFit/>
+          </a:bodyPr>
+          <a:lstStyle/>
+          <a:p>
+            <a:pPr algn="l"/>
+            <a:r>
+              <a:rPr sz="1300" b="0">
+                <a:solidFill>
+                  <a:srgbClr val="62584D"/>
+                </a:solidFill>
+                <a:latin typeface="Aptos"/>
+              </a:rPr>
+              <a:t>Coupure au dernier espace disponible.</a:t>
+            </a:r>
+          </a:p>
+        </p:txBody>
+      </p:sp>
+      <p:sp>
+        <p:nvSpPr>
+          <p:cNvPr id="15" name="TextBox 14"/>
+          <p:cNvSpPr txBox="1"/>
+          <p:nvPr/>
+        </p:nvSpPr>
+        <p:spPr>
+          <a:xfrm>
+            <a:off x="914400" y="3803904"/>
+            <a:ext cx="164592" cy="210312"/>
+          </a:xfrm>
+          <a:prstGeom prst="rect">
+            <a:avLst/>
+          </a:prstGeom>
+          <a:noFill/>
+        </p:spPr>
+        <p:txBody>
+          <a:bodyPr wrap="square" anchor="t">
+            <a:spAutoFit/>
+          </a:bodyPr>
+          <a:lstStyle/>
+          <a:p>
+            <a:pPr algn="l"/>
+            <a:r>
+              <a:rPr sz="1600" b="1">
+                <a:solidFill>
+                  <a:srgbClr val="B74F2A"/>
+                </a:solidFill>
+                <a:latin typeface="Aptos"/>
+              </a:rPr>
+              <a:t>•</a:t>
+            </a:r>
+          </a:p>
+        </p:txBody>
+      </p:sp>
+      <p:sp>
+        <p:nvSpPr>
+          <p:cNvPr id="16" name="TextBox 15"/>
+          <p:cNvSpPr txBox="1"/>
+          <p:nvPr/>
+        </p:nvSpPr>
+        <p:spPr>
+          <a:xfrm>
+            <a:off x="1143000" y="3803904"/>
+            <a:ext cx="2761488" cy="438912"/>
+          </a:xfrm>
+          <a:prstGeom prst="rect">
+            <a:avLst/>
+          </a:prstGeom>
+          <a:noFill/>
+        </p:spPr>
+        <p:txBody>
+          <a:bodyPr wrap="square" anchor="t">
+            <a:spAutoFit/>
+          </a:bodyPr>
+          <a:lstStyle/>
+          <a:p>
+            <a:pPr algn="l"/>
+            <a:r>
+              <a:rPr sz="1300" b="0">
+                <a:solidFill>
+                  <a:srgbClr val="62584D"/>
+                </a:solidFill>
+                <a:latin typeface="Aptos"/>
+              </a:rPr>
+              <a:t>Assez court pour une recherche fine, assez long pour garder le sens.</a:t>
+            </a:r>
+          </a:p>
+        </p:txBody>
+      </p:sp>
+      <p:sp>
+        <p:nvSpPr>
+          <p:cNvPr id="17" name="Rounded Rectangle 16"/>
           <p:cNvSpPr/>
           <p:nvPr/>
         </p:nvSpPr>
         <p:spPr>
           <a:xfrm>
-            <a:off x="2788920" y="2240280"/>
-            <a:ext cx="1965960" cy="1691640"/>
+            <a:off x="4343400" y="1874519"/>
+            <a:ext cx="3520440" cy="3566160"/>
           </a:xfrm>
           <a:prstGeom prst="roundRect">
             <a:avLst>
@@ -11264,11 +11472,11 @@
             </a:avLst>
           </a:prstGeom>
           <a:solidFill>
-            <a:srgbClr val="235F45"/>
+            <a:srgbClr val="FFFAF2"/>
           </a:solidFill>
           <a:ln>
             <a:solidFill>
-              <a:srgbClr val="235F45"/>
+              <a:srgbClr val="E1D5C7"/>
             </a:solidFill>
           </a:ln>
         </p:spPr>
@@ -11296,119 +11504,259 @@
       </p:sp>
       <p:sp>
         <p:nvSpPr>
-          <p:cNvPr id="14" name="TextBox 13"/>
-          <p:cNvSpPr txBox="1"/>
-          <p:nvPr/>
-        </p:nvSpPr>
-        <p:spPr>
-          <a:xfrm>
-            <a:off x="2935224" y="2523744"/>
-            <a:ext cx="1673352" cy="228600"/>
-          </a:xfrm>
-          <a:prstGeom prst="rect">
-            <a:avLst/>
-          </a:prstGeom>
-          <a:noFill/>
-        </p:spPr>
-        <p:txBody>
-          <a:bodyPr wrap="square" anchor="t">
-            <a:spAutoFit/>
-          </a:bodyPr>
-          <a:lstStyle/>
-          <a:p>
-            <a:pPr algn="ctr"/>
+          <p:cNvPr id="18" name="TextBox 17"/>
+          <p:cNvSpPr txBox="1"/>
+          <p:nvPr/>
+        </p:nvSpPr>
+        <p:spPr>
+          <a:xfrm>
+            <a:off x="4599432" y="2093976"/>
+            <a:ext cx="3008376" cy="320040"/>
+          </a:xfrm>
+          <a:prstGeom prst="rect">
+            <a:avLst/>
+          </a:prstGeom>
+          <a:noFill/>
+        </p:spPr>
+        <p:txBody>
+          <a:bodyPr wrap="square" anchor="t">
+            <a:spAutoFit/>
+          </a:bodyPr>
+          <a:lstStyle/>
+          <a:p>
+            <a:pPr algn="l"/>
             <a:r>
               <a:rPr sz="1600" b="1">
                 <a:solidFill>
-                  <a:srgbClr val="FFFFFF"/>
-                </a:solidFill>
-                <a:latin typeface="Aptos"/>
-              </a:rPr>
-              <a:t>Embedding</a:t>
-            </a:r>
-          </a:p>
-        </p:txBody>
-      </p:sp>
-      <p:sp>
-        <p:nvSpPr>
-          <p:cNvPr id="15" name="TextBox 14"/>
-          <p:cNvSpPr txBox="1"/>
-          <p:nvPr/>
-        </p:nvSpPr>
-        <p:spPr>
-          <a:xfrm>
-            <a:off x="2935224" y="2971800"/>
-            <a:ext cx="1673352" cy="548640"/>
-          </a:xfrm>
-          <a:prstGeom prst="rect">
-            <a:avLst/>
-          </a:prstGeom>
-          <a:noFill/>
-        </p:spPr>
-        <p:txBody>
-          <a:bodyPr wrap="square" anchor="t">
-            <a:spAutoFit/>
-          </a:bodyPr>
-          <a:lstStyle/>
-          <a:p>
-            <a:pPr algn="ctr"/>
-            <a:r>
-              <a:rPr sz="1100" b="0">
-                <a:solidFill>
-                  <a:srgbClr val="FFFFFF"/>
-                </a:solidFill>
-                <a:latin typeface="Aptos"/>
-              </a:rPr>
-              <a:t>Vecteur de la question</a:t>
-            </a:r>
-          </a:p>
-        </p:txBody>
-      </p:sp>
-      <p:sp>
-        <p:nvSpPr>
-          <p:cNvPr id="16" name="TextBox 15"/>
-          <p:cNvSpPr txBox="1"/>
-          <p:nvPr/>
-        </p:nvSpPr>
-        <p:spPr>
-          <a:xfrm>
-            <a:off x="4782312" y="2852928"/>
-            <a:ext cx="274320" cy="228600"/>
-          </a:xfrm>
-          <a:prstGeom prst="rect">
-            <a:avLst/>
-          </a:prstGeom>
-          <a:noFill/>
-        </p:spPr>
-        <p:txBody>
-          <a:bodyPr wrap="square" anchor="t">
-            <a:spAutoFit/>
-          </a:bodyPr>
-          <a:lstStyle/>
-          <a:p>
-            <a:pPr algn="ctr"/>
-            <a:r>
-              <a:rPr sz="1800" b="1">
-                <a:solidFill>
-                  <a:srgbClr val="7F2F16"/>
-                </a:solidFill>
-                <a:latin typeface="Aptos"/>
-              </a:rPr>
-              <a:t>→</a:t>
-            </a:r>
-          </a:p>
-        </p:txBody>
-      </p:sp>
-      <p:sp>
-        <p:nvSpPr>
-          <p:cNvPr id="17" name="Rounded Rectangle 16"/>
+                  <a:srgbClr val="1F1B16"/>
+                </a:solidFill>
+                <a:latin typeface="Aptos"/>
+              </a:rPr>
+              <a:t>Recouvrement</a:t>
+            </a:r>
+          </a:p>
+        </p:txBody>
+      </p:sp>
+      <p:sp>
+        <p:nvSpPr>
+          <p:cNvPr id="19" name="TextBox 18"/>
+          <p:cNvSpPr txBox="1"/>
+          <p:nvPr/>
+        </p:nvSpPr>
+        <p:spPr>
+          <a:xfrm>
+            <a:off x="4617720" y="2560320"/>
+            <a:ext cx="164592" cy="210312"/>
+          </a:xfrm>
+          <a:prstGeom prst="rect">
+            <a:avLst/>
+          </a:prstGeom>
+          <a:noFill/>
+        </p:spPr>
+        <p:txBody>
+          <a:bodyPr wrap="square" anchor="t">
+            <a:spAutoFit/>
+          </a:bodyPr>
+          <a:lstStyle/>
+          <a:p>
+            <a:pPr algn="l"/>
+            <a:r>
+              <a:rPr sz="1600" b="1">
+                <a:solidFill>
+                  <a:srgbClr val="235F45"/>
+                </a:solidFill>
+                <a:latin typeface="Aptos"/>
+              </a:rPr>
+              <a:t>•</a:t>
+            </a:r>
+          </a:p>
+        </p:txBody>
+      </p:sp>
+      <p:sp>
+        <p:nvSpPr>
+          <p:cNvPr id="20" name="TextBox 19"/>
+          <p:cNvSpPr txBox="1"/>
+          <p:nvPr/>
+        </p:nvSpPr>
+        <p:spPr>
+          <a:xfrm>
+            <a:off x="4846320" y="2560320"/>
+            <a:ext cx="2761488" cy="438912"/>
+          </a:xfrm>
+          <a:prstGeom prst="rect">
+            <a:avLst/>
+          </a:prstGeom>
+          <a:noFill/>
+        </p:spPr>
+        <p:txBody>
+          <a:bodyPr wrap="square" anchor="t">
+            <a:spAutoFit/>
+          </a:bodyPr>
+          <a:lstStyle/>
+          <a:p>
+            <a:pPr algn="l"/>
+            <a:r>
+              <a:rPr sz="1300" b="0">
+                <a:solidFill>
+                  <a:srgbClr val="62584D"/>
+                </a:solidFill>
+                <a:latin typeface="Aptos"/>
+              </a:rPr>
+              <a:t>120 caractères entre deux chunks voisins.</a:t>
+            </a:r>
+          </a:p>
+        </p:txBody>
+      </p:sp>
+      <p:sp>
+        <p:nvSpPr>
+          <p:cNvPr id="21" name="TextBox 20"/>
+          <p:cNvSpPr txBox="1"/>
+          <p:nvPr/>
+        </p:nvSpPr>
+        <p:spPr>
+          <a:xfrm>
+            <a:off x="4617720" y="3182112"/>
+            <a:ext cx="164592" cy="210312"/>
+          </a:xfrm>
+          <a:prstGeom prst="rect">
+            <a:avLst/>
+          </a:prstGeom>
+          <a:noFill/>
+        </p:spPr>
+        <p:txBody>
+          <a:bodyPr wrap="square" anchor="t">
+            <a:spAutoFit/>
+          </a:bodyPr>
+          <a:lstStyle/>
+          <a:p>
+            <a:pPr algn="l"/>
+            <a:r>
+              <a:rPr sz="1600" b="1">
+                <a:solidFill>
+                  <a:srgbClr val="235F45"/>
+                </a:solidFill>
+                <a:latin typeface="Aptos"/>
+              </a:rPr>
+              <a:t>•</a:t>
+            </a:r>
+          </a:p>
+        </p:txBody>
+      </p:sp>
+      <p:sp>
+        <p:nvSpPr>
+          <p:cNvPr id="22" name="TextBox 21"/>
+          <p:cNvSpPr txBox="1"/>
+          <p:nvPr/>
+        </p:nvSpPr>
+        <p:spPr>
+          <a:xfrm>
+            <a:off x="4846320" y="3182112"/>
+            <a:ext cx="2761488" cy="438912"/>
+          </a:xfrm>
+          <a:prstGeom prst="rect">
+            <a:avLst/>
+          </a:prstGeom>
+          <a:noFill/>
+        </p:spPr>
+        <p:txBody>
+          <a:bodyPr wrap="square" anchor="t">
+            <a:spAutoFit/>
+          </a:bodyPr>
+          <a:lstStyle/>
+          <a:p>
+            <a:pPr algn="l"/>
+            <a:r>
+              <a:rPr sz="1300" b="0">
+                <a:solidFill>
+                  <a:srgbClr val="62584D"/>
+                </a:solidFill>
+                <a:latin typeface="Aptos"/>
+              </a:rPr>
+              <a:t>Préserve le contexte à la frontière d'une coupe.</a:t>
+            </a:r>
+          </a:p>
+        </p:txBody>
+      </p:sp>
+      <p:sp>
+        <p:nvSpPr>
+          <p:cNvPr id="23" name="TextBox 22"/>
+          <p:cNvSpPr txBox="1"/>
+          <p:nvPr/>
+        </p:nvSpPr>
+        <p:spPr>
+          <a:xfrm>
+            <a:off x="4617720" y="3803904"/>
+            <a:ext cx="164592" cy="210312"/>
+          </a:xfrm>
+          <a:prstGeom prst="rect">
+            <a:avLst/>
+          </a:prstGeom>
+          <a:noFill/>
+        </p:spPr>
+        <p:txBody>
+          <a:bodyPr wrap="square" anchor="t">
+            <a:spAutoFit/>
+          </a:bodyPr>
+          <a:lstStyle/>
+          <a:p>
+            <a:pPr algn="l"/>
+            <a:r>
+              <a:rPr sz="1600" b="1">
+                <a:solidFill>
+                  <a:srgbClr val="235F45"/>
+                </a:solidFill>
+                <a:latin typeface="Aptos"/>
+              </a:rPr>
+              <a:t>•</a:t>
+            </a:r>
+          </a:p>
+        </p:txBody>
+      </p:sp>
+      <p:sp>
+        <p:nvSpPr>
+          <p:cNvPr id="24" name="TextBox 23"/>
+          <p:cNvSpPr txBox="1"/>
+          <p:nvPr/>
+        </p:nvSpPr>
+        <p:spPr>
+          <a:xfrm>
+            <a:off x="4846320" y="3803904"/>
+            <a:ext cx="2761488" cy="438912"/>
+          </a:xfrm>
+          <a:prstGeom prst="rect">
+            <a:avLst/>
+          </a:prstGeom>
+          <a:noFill/>
+        </p:spPr>
+        <p:txBody>
+          <a:bodyPr wrap="square" anchor="t">
+            <a:spAutoFit/>
+          </a:bodyPr>
+          <a:lstStyle/>
+          <a:p>
+            <a:pPr algn="l"/>
+            <a:r>
+              <a:rPr sz="1300" b="0">
+                <a:solidFill>
+                  <a:srgbClr val="62584D"/>
+                </a:solidFill>
+                <a:latin typeface="Aptos"/>
+              </a:rPr>
+              <a:t>Compromis : moins de perte de sens, sans trop de doublons.</a:t>
+            </a:r>
+          </a:p>
+        </p:txBody>
+      </p:sp>
+      <p:sp>
+        <p:nvSpPr>
+          <p:cNvPr id="25" name="Rounded Rectangle 24"/>
           <p:cNvSpPr/>
           <p:nvPr/>
         </p:nvSpPr>
         <p:spPr>
           <a:xfrm>
-            <a:off x="5138927" y="2240280"/>
-            <a:ext cx="1965960" cy="1691640"/>
+            <a:off x="8046720" y="1874519"/>
+            <a:ext cx="3520440" cy="3566160"/>
           </a:xfrm>
           <a:prstGeom prst="roundRect">
             <a:avLst>
@@ -11416,11 +11764,11 @@
             </a:avLst>
           </a:prstGeom>
           <a:solidFill>
-            <a:srgbClr val="B74F2A"/>
+            <a:srgbClr val="FFFAF2"/>
           </a:solidFill>
           <a:ln>
             <a:solidFill>
-              <a:srgbClr val="B74F2A"/>
+              <a:srgbClr val="E1D5C7"/>
             </a:solidFill>
           </a:ln>
         </p:spPr>
@@ -11448,412 +11796,245 @@
       </p:sp>
       <p:sp>
         <p:nvSpPr>
-          <p:cNvPr id="18" name="TextBox 17"/>
-          <p:cNvSpPr txBox="1"/>
-          <p:nvPr/>
-        </p:nvSpPr>
-        <p:spPr>
-          <a:xfrm>
-            <a:off x="5285231" y="2523744"/>
-            <a:ext cx="1673352" cy="228600"/>
-          </a:xfrm>
-          <a:prstGeom prst="rect">
-            <a:avLst/>
-          </a:prstGeom>
-          <a:noFill/>
-        </p:spPr>
-        <p:txBody>
-          <a:bodyPr wrap="square" anchor="t">
-            <a:spAutoFit/>
-          </a:bodyPr>
-          <a:lstStyle/>
-          <a:p>
-            <a:pPr algn="ctr"/>
+          <p:cNvPr id="26" name="TextBox 25"/>
+          <p:cNvSpPr txBox="1"/>
+          <p:nvPr/>
+        </p:nvSpPr>
+        <p:spPr>
+          <a:xfrm>
+            <a:off x="8302752" y="2093976"/>
+            <a:ext cx="3008376" cy="320040"/>
+          </a:xfrm>
+          <a:prstGeom prst="rect">
+            <a:avLst/>
+          </a:prstGeom>
+          <a:noFill/>
+        </p:spPr>
+        <p:txBody>
+          <a:bodyPr wrap="square" anchor="t">
+            <a:spAutoFit/>
+          </a:bodyPr>
+          <a:lstStyle/>
+          <a:p>
+            <a:pPr algn="l"/>
             <a:r>
               <a:rPr sz="1600" b="1">
                 <a:solidFill>
-                  <a:srgbClr val="FFFFFF"/>
-                </a:solidFill>
-                <a:latin typeface="Aptos"/>
-              </a:rPr>
-              <a:t>Recherche</a:t>
-            </a:r>
-          </a:p>
-        </p:txBody>
-      </p:sp>
-      <p:sp>
-        <p:nvSpPr>
-          <p:cNvPr id="19" name="TextBox 18"/>
-          <p:cNvSpPr txBox="1"/>
-          <p:nvPr/>
-        </p:nvSpPr>
-        <p:spPr>
-          <a:xfrm>
-            <a:off x="5285231" y="2971800"/>
-            <a:ext cx="1673352" cy="548640"/>
-          </a:xfrm>
-          <a:prstGeom prst="rect">
-            <a:avLst/>
-          </a:prstGeom>
-          <a:noFill/>
-        </p:spPr>
-        <p:txBody>
-          <a:bodyPr wrap="square" anchor="t">
-            <a:spAutoFit/>
-          </a:bodyPr>
-          <a:lstStyle/>
-          <a:p>
-            <a:pPr algn="ctr"/>
-            <a:r>
-              <a:rPr sz="1100" b="0">
-                <a:solidFill>
-                  <a:srgbClr val="FFFFFF"/>
-                </a:solidFill>
-                <a:latin typeface="Aptos"/>
-              </a:rPr>
-              <a:t>FAISS retrouve
-les textes proches</a:t>
-            </a:r>
-          </a:p>
-        </p:txBody>
-      </p:sp>
-      <p:sp>
-        <p:nvSpPr>
-          <p:cNvPr id="20" name="TextBox 19"/>
-          <p:cNvSpPr txBox="1"/>
-          <p:nvPr/>
-        </p:nvSpPr>
-        <p:spPr>
-          <a:xfrm>
-            <a:off x="7132319" y="2852928"/>
-            <a:ext cx="274320" cy="228600"/>
-          </a:xfrm>
-          <a:prstGeom prst="rect">
-            <a:avLst/>
-          </a:prstGeom>
-          <a:noFill/>
-        </p:spPr>
-        <p:txBody>
-          <a:bodyPr wrap="square" anchor="t">
-            <a:spAutoFit/>
-          </a:bodyPr>
-          <a:lstStyle/>
-          <a:p>
-            <a:pPr algn="ctr"/>
-            <a:r>
-              <a:rPr sz="1800" b="1">
-                <a:solidFill>
-                  <a:srgbClr val="7F2F16"/>
-                </a:solidFill>
-                <a:latin typeface="Aptos"/>
-              </a:rPr>
-              <a:t>→</a:t>
-            </a:r>
-          </a:p>
-        </p:txBody>
-      </p:sp>
-      <p:sp>
-        <p:nvSpPr>
-          <p:cNvPr id="21" name="Rounded Rectangle 20"/>
-          <p:cNvSpPr/>
-          <p:nvPr/>
-        </p:nvSpPr>
-        <p:spPr>
-          <a:xfrm>
-            <a:off x="7488936" y="2240280"/>
-            <a:ext cx="1965960" cy="1691640"/>
-          </a:xfrm>
-          <a:prstGeom prst="roundRect">
-            <a:avLst>
-              <a:gd name="adj" fmla="val 12000"/>
-            </a:avLst>
-          </a:prstGeom>
-          <a:solidFill>
-            <a:srgbClr val="235F45"/>
-          </a:solidFill>
-          <a:ln>
-            <a:solidFill>
-              <a:srgbClr val="235F45"/>
-            </a:solidFill>
-          </a:ln>
-        </p:spPr>
-        <p:style>
-          <a:lnRef idx="1">
-            <a:schemeClr val="accent1"/>
-          </a:lnRef>
-          <a:fillRef idx="3">
-            <a:schemeClr val="accent1"/>
-          </a:fillRef>
-          <a:effectRef idx="2">
-            <a:schemeClr val="accent1"/>
-          </a:effectRef>
-          <a:fontRef idx="minor">
-            <a:schemeClr val="lt1"/>
-          </a:fontRef>
-        </p:style>
-        <p:txBody>
-          <a:bodyPr rtlCol="0" anchor="ctr"/>
-          <a:lstStyle/>
-          <a:p>
-            <a:pPr algn="ctr"/>
-          </a:p>
-        </p:txBody>
-      </p:sp>
-      <p:sp>
-        <p:nvSpPr>
-          <p:cNvPr id="22" name="TextBox 21"/>
-          <p:cNvSpPr txBox="1"/>
-          <p:nvPr/>
-        </p:nvSpPr>
-        <p:spPr>
-          <a:xfrm>
-            <a:off x="7635240" y="2523744"/>
-            <a:ext cx="1673352" cy="228600"/>
-          </a:xfrm>
-          <a:prstGeom prst="rect">
-            <a:avLst/>
-          </a:prstGeom>
-          <a:noFill/>
-        </p:spPr>
-        <p:txBody>
-          <a:bodyPr wrap="square" anchor="t">
-            <a:spAutoFit/>
-          </a:bodyPr>
-          <a:lstStyle/>
-          <a:p>
-            <a:pPr algn="ctr"/>
+                  <a:srgbClr val="1F1B16"/>
+                </a:solidFill>
+                <a:latin typeface="Aptos"/>
+              </a:rPr>
+              <a:t>Embeddings Mistral</a:t>
+            </a:r>
+          </a:p>
+        </p:txBody>
+      </p:sp>
+      <p:sp>
+        <p:nvSpPr>
+          <p:cNvPr id="27" name="TextBox 26"/>
+          <p:cNvSpPr txBox="1"/>
+          <p:nvPr/>
+        </p:nvSpPr>
+        <p:spPr>
+          <a:xfrm>
+            <a:off x="8321040" y="2560320"/>
+            <a:ext cx="164592" cy="210312"/>
+          </a:xfrm>
+          <a:prstGeom prst="rect">
+            <a:avLst/>
+          </a:prstGeom>
+          <a:noFill/>
+        </p:spPr>
+        <p:txBody>
+          <a:bodyPr wrap="square" anchor="t">
+            <a:spAutoFit/>
+          </a:bodyPr>
+          <a:lstStyle/>
+          <a:p>
+            <a:pPr algn="l"/>
             <a:r>
               <a:rPr sz="1600" b="1">
                 <a:solidFill>
-                  <a:srgbClr val="FFFFFF"/>
-                </a:solidFill>
-                <a:latin typeface="Aptos"/>
-              </a:rPr>
-              <a:t>Informations</a:t>
-            </a:r>
-          </a:p>
-        </p:txBody>
-      </p:sp>
-      <p:sp>
-        <p:nvSpPr>
-          <p:cNvPr id="23" name="TextBox 22"/>
-          <p:cNvSpPr txBox="1"/>
-          <p:nvPr/>
-        </p:nvSpPr>
-        <p:spPr>
-          <a:xfrm>
-            <a:off x="7635240" y="2971800"/>
-            <a:ext cx="1673352" cy="548640"/>
-          </a:xfrm>
-          <a:prstGeom prst="rect">
-            <a:avLst/>
-          </a:prstGeom>
-          <a:noFill/>
-        </p:spPr>
-        <p:txBody>
-          <a:bodyPr wrap="square" anchor="t">
-            <a:spAutoFit/>
-          </a:bodyPr>
-          <a:lstStyle/>
-          <a:p>
-            <a:pPr algn="ctr"/>
-            <a:r>
-              <a:rPr sz="1100" b="0">
-                <a:solidFill>
-                  <a:srgbClr val="FFFFFF"/>
-                </a:solidFill>
-                <a:latin typeface="Aptos"/>
-              </a:rPr>
-              <a:t>Dates, lieux,
-descriptions, scores</a:t>
-            </a:r>
-          </a:p>
-        </p:txBody>
-      </p:sp>
-      <p:sp>
-        <p:nvSpPr>
-          <p:cNvPr id="24" name="TextBox 23"/>
-          <p:cNvSpPr txBox="1"/>
-          <p:nvPr/>
-        </p:nvSpPr>
-        <p:spPr>
-          <a:xfrm>
-            <a:off x="9482328" y="2852928"/>
-            <a:ext cx="274320" cy="228600"/>
-          </a:xfrm>
-          <a:prstGeom prst="rect">
-            <a:avLst/>
-          </a:prstGeom>
-          <a:noFill/>
-        </p:spPr>
-        <p:txBody>
-          <a:bodyPr wrap="square" anchor="t">
-            <a:spAutoFit/>
-          </a:bodyPr>
-          <a:lstStyle/>
-          <a:p>
-            <a:pPr algn="ctr"/>
-            <a:r>
-              <a:rPr sz="1800" b="1">
-                <a:solidFill>
-                  <a:srgbClr val="7F2F16"/>
-                </a:solidFill>
-                <a:latin typeface="Aptos"/>
-              </a:rPr>
-              <a:t>→</a:t>
-            </a:r>
-          </a:p>
-        </p:txBody>
-      </p:sp>
-      <p:sp>
-        <p:nvSpPr>
-          <p:cNvPr id="25" name="Rounded Rectangle 24"/>
-          <p:cNvSpPr/>
-          <p:nvPr/>
-        </p:nvSpPr>
-        <p:spPr>
-          <a:xfrm>
-            <a:off x="9838944" y="2240280"/>
-            <a:ext cx="1965960" cy="1691640"/>
-          </a:xfrm>
-          <a:prstGeom prst="roundRect">
-            <a:avLst>
-              <a:gd name="adj" fmla="val 12000"/>
-            </a:avLst>
-          </a:prstGeom>
-          <a:solidFill>
-            <a:srgbClr val="B74F2A"/>
-          </a:solidFill>
-          <a:ln>
-            <a:solidFill>
-              <a:srgbClr val="B74F2A"/>
-            </a:solidFill>
-          </a:ln>
-        </p:spPr>
-        <p:style>
-          <a:lnRef idx="1">
-            <a:schemeClr val="accent1"/>
-          </a:lnRef>
-          <a:fillRef idx="3">
-            <a:schemeClr val="accent1"/>
-          </a:fillRef>
-          <a:effectRef idx="2">
-            <a:schemeClr val="accent1"/>
-          </a:effectRef>
-          <a:fontRef idx="minor">
-            <a:schemeClr val="lt1"/>
-          </a:fontRef>
-        </p:style>
-        <p:txBody>
-          <a:bodyPr rtlCol="0" anchor="ctr"/>
-          <a:lstStyle/>
-          <a:p>
-            <a:pPr algn="ctr"/>
-          </a:p>
-        </p:txBody>
-      </p:sp>
-      <p:sp>
-        <p:nvSpPr>
-          <p:cNvPr id="26" name="TextBox 25"/>
-          <p:cNvSpPr txBox="1"/>
-          <p:nvPr/>
-        </p:nvSpPr>
-        <p:spPr>
-          <a:xfrm>
-            <a:off x="9985248" y="2523744"/>
-            <a:ext cx="1673352" cy="228600"/>
-          </a:xfrm>
-          <a:prstGeom prst="rect">
-            <a:avLst/>
-          </a:prstGeom>
-          <a:noFill/>
-        </p:spPr>
-        <p:txBody>
-          <a:bodyPr wrap="square" anchor="t">
-            <a:spAutoFit/>
-          </a:bodyPr>
-          <a:lstStyle/>
-          <a:p>
-            <a:pPr algn="ctr"/>
+                  <a:srgbClr val="B74F2A"/>
+                </a:solidFill>
+                <a:latin typeface="Aptos"/>
+              </a:rPr>
+              <a:t>•</a:t>
+            </a:r>
+          </a:p>
+        </p:txBody>
+      </p:sp>
+      <p:sp>
+        <p:nvSpPr>
+          <p:cNvPr id="28" name="TextBox 27"/>
+          <p:cNvSpPr txBox="1"/>
+          <p:nvPr/>
+        </p:nvSpPr>
+        <p:spPr>
+          <a:xfrm>
+            <a:off x="8549640" y="2560320"/>
+            <a:ext cx="2761488" cy="438912"/>
+          </a:xfrm>
+          <a:prstGeom prst="rect">
+            <a:avLst/>
+          </a:prstGeom>
+          <a:noFill/>
+        </p:spPr>
+        <p:txBody>
+          <a:bodyPr wrap="square" anchor="t">
+            <a:spAutoFit/>
+          </a:bodyPr>
+          <a:lstStyle/>
+          <a:p>
+            <a:pPr algn="l"/>
+            <a:r>
+              <a:rPr sz="1300" b="0">
+                <a:solidFill>
+                  <a:srgbClr val="62584D"/>
+                </a:solidFill>
+                <a:latin typeface="Aptos"/>
+              </a:rPr>
+              <a:t>mistral-embed transforme les chunks en vecteurs.</a:t>
+            </a:r>
+          </a:p>
+        </p:txBody>
+      </p:sp>
+      <p:sp>
+        <p:nvSpPr>
+          <p:cNvPr id="29" name="TextBox 28"/>
+          <p:cNvSpPr txBox="1"/>
+          <p:nvPr/>
+        </p:nvSpPr>
+        <p:spPr>
+          <a:xfrm>
+            <a:off x="8321040" y="3182112"/>
+            <a:ext cx="164592" cy="210312"/>
+          </a:xfrm>
+          <a:prstGeom prst="rect">
+            <a:avLst/>
+          </a:prstGeom>
+          <a:noFill/>
+        </p:spPr>
+        <p:txBody>
+          <a:bodyPr wrap="square" anchor="t">
+            <a:spAutoFit/>
+          </a:bodyPr>
+          <a:lstStyle/>
+          <a:p>
+            <a:pPr algn="l"/>
             <a:r>
               <a:rPr sz="1600" b="1">
                 <a:solidFill>
-                  <a:srgbClr val="FFFFFF"/>
-                </a:solidFill>
-                <a:latin typeface="Aptos"/>
-              </a:rPr>
-              <a:t>Réponse</a:t>
-            </a:r>
-          </a:p>
-        </p:txBody>
-      </p:sp>
-      <p:sp>
-        <p:nvSpPr>
-          <p:cNvPr id="27" name="TextBox 26"/>
-          <p:cNvSpPr txBox="1"/>
-          <p:nvPr/>
-        </p:nvSpPr>
-        <p:spPr>
-          <a:xfrm>
-            <a:off x="9985248" y="2971800"/>
-            <a:ext cx="1673352" cy="548640"/>
-          </a:xfrm>
-          <a:prstGeom prst="rect">
-            <a:avLst/>
-          </a:prstGeom>
-          <a:noFill/>
-        </p:spPr>
-        <p:txBody>
-          <a:bodyPr wrap="square" anchor="t">
-            <a:spAutoFit/>
-          </a:bodyPr>
-          <a:lstStyle/>
-          <a:p>
-            <a:pPr algn="ctr"/>
-            <a:r>
-              <a:rPr sz="1100" b="0">
-                <a:solidFill>
-                  <a:srgbClr val="FFFFFF"/>
-                </a:solidFill>
-                <a:latin typeface="Aptos"/>
-              </a:rPr>
-              <a:t>Mistral formule
-une réponse utile</a:t>
-            </a:r>
-          </a:p>
-        </p:txBody>
-      </p:sp>
-      <p:sp>
-        <p:nvSpPr>
-          <p:cNvPr id="28" name="TextBox 27"/>
-          <p:cNvSpPr txBox="1"/>
-          <p:nvPr/>
-        </p:nvSpPr>
-        <p:spPr>
-          <a:xfrm>
-            <a:off x="1051560" y="4846320"/>
-            <a:ext cx="10058400" cy="274320"/>
-          </a:xfrm>
-          <a:prstGeom prst="rect">
-            <a:avLst/>
-          </a:prstGeom>
-          <a:noFill/>
-        </p:spPr>
-        <p:txBody>
-          <a:bodyPr wrap="square" anchor="t">
-            <a:spAutoFit/>
-          </a:bodyPr>
-          <a:lstStyle/>
-          <a:p>
-            <a:pPr algn="ctr"/>
-            <a:r>
-              <a:rPr sz="1400" b="1">
-                <a:solidFill>
-                  <a:srgbClr val="7F2F16"/>
-                </a:solidFill>
-                <a:latin typeface="Aptos"/>
-              </a:rPr>
-              <a:t>Règle importante : ne s'appuyer que sur les informations trouvées, sans inventer d'événement.</a:t>
+                  <a:srgbClr val="B74F2A"/>
+                </a:solidFill>
+                <a:latin typeface="Aptos"/>
+              </a:rPr>
+              <a:t>•</a:t>
+            </a:r>
+          </a:p>
+        </p:txBody>
+      </p:sp>
+      <p:sp>
+        <p:nvSpPr>
+          <p:cNvPr id="30" name="TextBox 29"/>
+          <p:cNvSpPr txBox="1"/>
+          <p:nvPr/>
+        </p:nvSpPr>
+        <p:spPr>
+          <a:xfrm>
+            <a:off x="8549640" y="3182112"/>
+            <a:ext cx="2761488" cy="438912"/>
+          </a:xfrm>
+          <a:prstGeom prst="rect">
+            <a:avLst/>
+          </a:prstGeom>
+          <a:noFill/>
+        </p:spPr>
+        <p:txBody>
+          <a:bodyPr wrap="square" anchor="t">
+            <a:spAutoFit/>
+          </a:bodyPr>
+          <a:lstStyle/>
+          <a:p>
+            <a:pPr algn="l"/>
+            <a:r>
+              <a:rPr sz="1300" b="0">
+                <a:solidFill>
+                  <a:srgbClr val="62584D"/>
+                </a:solidFill>
+                <a:latin typeface="Aptos"/>
+              </a:rPr>
+              <a:t>Batches de 32, pause et retries contre les quotas.</a:t>
+            </a:r>
+          </a:p>
+        </p:txBody>
+      </p:sp>
+      <p:sp>
+        <p:nvSpPr>
+          <p:cNvPr id="31" name="TextBox 30"/>
+          <p:cNvSpPr txBox="1"/>
+          <p:nvPr/>
+        </p:nvSpPr>
+        <p:spPr>
+          <a:xfrm>
+            <a:off x="8321040" y="3803904"/>
+            <a:ext cx="164592" cy="210312"/>
+          </a:xfrm>
+          <a:prstGeom prst="rect">
+            <a:avLst/>
+          </a:prstGeom>
+          <a:noFill/>
+        </p:spPr>
+        <p:txBody>
+          <a:bodyPr wrap="square" anchor="t">
+            <a:spAutoFit/>
+          </a:bodyPr>
+          <a:lstStyle/>
+          <a:p>
+            <a:pPr algn="l"/>
+            <a:r>
+              <a:rPr sz="1600" b="1">
+                <a:solidFill>
+                  <a:srgbClr val="B74F2A"/>
+                </a:solidFill>
+                <a:latin typeface="Aptos"/>
+              </a:rPr>
+              <a:t>•</a:t>
+            </a:r>
+          </a:p>
+        </p:txBody>
+      </p:sp>
+      <p:sp>
+        <p:nvSpPr>
+          <p:cNvPr id="32" name="TextBox 31"/>
+          <p:cNvSpPr txBox="1"/>
+          <p:nvPr/>
+        </p:nvSpPr>
+        <p:spPr>
+          <a:xfrm>
+            <a:off x="8549640" y="3803904"/>
+            <a:ext cx="2761488" cy="438912"/>
+          </a:xfrm>
+          <a:prstGeom prst="rect">
+            <a:avLst/>
+          </a:prstGeom>
+          <a:noFill/>
+        </p:spPr>
+        <p:txBody>
+          <a:bodyPr wrap="square" anchor="t">
+            <a:spAutoFit/>
+          </a:bodyPr>
+          <a:lstStyle/>
+          <a:p>
+            <a:pPr algn="l"/>
+            <a:r>
+              <a:rPr sz="1300" b="0">
+                <a:solidFill>
+                  <a:srgbClr val="62584D"/>
+                </a:solidFill>
+                <a:latin typeface="Aptos"/>
+              </a:rPr>
+              <a:t>Vecteurs float32 normalisés L2 pour FAISS.</a:t>
             </a:r>
           </a:p>
         </p:txBody>
@@ -12109,7 +12290,7 @@
                 </a:solidFill>
                 <a:latin typeface="Aptos Display"/>
               </a:rPr>
-              <a:t>Comment le projet est organisé</a:t>
+              <a:t>Construire l'index vectoriel</a:t>
             </a:r>
           </a:p>
         </p:txBody>
@@ -12144,7 +12325,7 @@
                 </a:solidFill>
                 <a:latin typeface="Aptos"/>
               </a:rPr>
-              <a:t>Des étapes séparées pour garder une application claire et facile à tester.</a:t>
+              <a:t>Le choix d'index privilégie la qualité de récupération et la simplicité au volume actuel.</a:t>
             </a:r>
           </a:p>
         </p:txBody>
@@ -12157,8 +12338,8 @@
         </p:nvSpPr>
         <p:spPr>
           <a:xfrm>
-            <a:off x="1143000" y="1783080"/>
-            <a:ext cx="9921240" cy="713232"/>
+            <a:off x="640080" y="1828800"/>
+            <a:ext cx="3520440" cy="3611880"/>
           </a:xfrm>
           <a:prstGeom prst="roundRect">
             <a:avLst>
@@ -12198,132 +12379,259 @@
       </p:sp>
       <p:sp>
         <p:nvSpPr>
-          <p:cNvPr id="10" name="Rounded Rectangle 9"/>
+          <p:cNvPr id="10" name="TextBox 9"/>
+          <p:cNvSpPr txBox="1"/>
+          <p:nvPr/>
+        </p:nvSpPr>
+        <p:spPr>
+          <a:xfrm>
+            <a:off x="896112" y="2048256"/>
+            <a:ext cx="3008376" cy="320040"/>
+          </a:xfrm>
+          <a:prstGeom prst="rect">
+            <a:avLst/>
+          </a:prstGeom>
+          <a:noFill/>
+        </p:spPr>
+        <p:txBody>
+          <a:bodyPr wrap="square" anchor="t">
+            <a:spAutoFit/>
+          </a:bodyPr>
+          <a:lstStyle/>
+          <a:p>
+            <a:pPr algn="l"/>
+            <a:r>
+              <a:rPr sz="1600" b="1">
+                <a:solidFill>
+                  <a:srgbClr val="1F1B16"/>
+                </a:solidFill>
+                <a:latin typeface="Aptos"/>
+              </a:rPr>
+              <a:t>IndexFlatIP retenu</a:t>
+            </a:r>
+          </a:p>
+        </p:txBody>
+      </p:sp>
+      <p:sp>
+        <p:nvSpPr>
+          <p:cNvPr id="11" name="TextBox 10"/>
+          <p:cNvSpPr txBox="1"/>
+          <p:nvPr/>
+        </p:nvSpPr>
+        <p:spPr>
+          <a:xfrm>
+            <a:off x="914400" y="2514600"/>
+            <a:ext cx="164592" cy="210312"/>
+          </a:xfrm>
+          <a:prstGeom prst="rect">
+            <a:avLst/>
+          </a:prstGeom>
+          <a:noFill/>
+        </p:spPr>
+        <p:txBody>
+          <a:bodyPr wrap="square" anchor="t">
+            <a:spAutoFit/>
+          </a:bodyPr>
+          <a:lstStyle/>
+          <a:p>
+            <a:pPr algn="l"/>
+            <a:r>
+              <a:rPr sz="1600" b="1">
+                <a:solidFill>
+                  <a:srgbClr val="B74F2A"/>
+                </a:solidFill>
+                <a:latin typeface="Aptos"/>
+              </a:rPr>
+              <a:t>•</a:t>
+            </a:r>
+          </a:p>
+        </p:txBody>
+      </p:sp>
+      <p:sp>
+        <p:nvSpPr>
+          <p:cNvPr id="12" name="TextBox 11"/>
+          <p:cNvSpPr txBox="1"/>
+          <p:nvPr/>
+        </p:nvSpPr>
+        <p:spPr>
+          <a:xfrm>
+            <a:off x="1143000" y="2514600"/>
+            <a:ext cx="2761488" cy="438912"/>
+          </a:xfrm>
+          <a:prstGeom prst="rect">
+            <a:avLst/>
+          </a:prstGeom>
+          <a:noFill/>
+        </p:spPr>
+        <p:txBody>
+          <a:bodyPr wrap="square" anchor="t">
+            <a:spAutoFit/>
+          </a:bodyPr>
+          <a:lstStyle/>
+          <a:p>
+            <a:pPr algn="l"/>
+            <a:r>
+              <a:rPr sz="1300" b="0">
+                <a:solidFill>
+                  <a:srgbClr val="62584D"/>
+                </a:solidFill>
+                <a:latin typeface="Aptos"/>
+              </a:rPr>
+              <a:t>Produit scalaire sur vecteurs normalisés = similarité cosinus.</a:t>
+            </a:r>
+          </a:p>
+        </p:txBody>
+      </p:sp>
+      <p:sp>
+        <p:nvSpPr>
+          <p:cNvPr id="13" name="TextBox 12"/>
+          <p:cNvSpPr txBox="1"/>
+          <p:nvPr/>
+        </p:nvSpPr>
+        <p:spPr>
+          <a:xfrm>
+            <a:off x="914400" y="3136392"/>
+            <a:ext cx="164592" cy="210312"/>
+          </a:xfrm>
+          <a:prstGeom prst="rect">
+            <a:avLst/>
+          </a:prstGeom>
+          <a:noFill/>
+        </p:spPr>
+        <p:txBody>
+          <a:bodyPr wrap="square" anchor="t">
+            <a:spAutoFit/>
+          </a:bodyPr>
+          <a:lstStyle/>
+          <a:p>
+            <a:pPr algn="l"/>
+            <a:r>
+              <a:rPr sz="1600" b="1">
+                <a:solidFill>
+                  <a:srgbClr val="B74F2A"/>
+                </a:solidFill>
+                <a:latin typeface="Aptos"/>
+              </a:rPr>
+              <a:t>•</a:t>
+            </a:r>
+          </a:p>
+        </p:txBody>
+      </p:sp>
+      <p:sp>
+        <p:nvSpPr>
+          <p:cNvPr id="14" name="TextBox 13"/>
+          <p:cNvSpPr txBox="1"/>
+          <p:nvPr/>
+        </p:nvSpPr>
+        <p:spPr>
+          <a:xfrm>
+            <a:off x="1143000" y="3136392"/>
+            <a:ext cx="2761488" cy="438912"/>
+          </a:xfrm>
+          <a:prstGeom prst="rect">
+            <a:avLst/>
+          </a:prstGeom>
+          <a:noFill/>
+        </p:spPr>
+        <p:txBody>
+          <a:bodyPr wrap="square" anchor="t">
+            <a:spAutoFit/>
+          </a:bodyPr>
+          <a:lstStyle/>
+          <a:p>
+            <a:pPr algn="l"/>
+            <a:r>
+              <a:rPr sz="1300" b="0">
+                <a:solidFill>
+                  <a:srgbClr val="62584D"/>
+                </a:solidFill>
+                <a:latin typeface="Aptos"/>
+              </a:rPr>
+              <a:t>Recherche exacte sur environ 65 000 chunks.</a:t>
+            </a:r>
+          </a:p>
+        </p:txBody>
+      </p:sp>
+      <p:sp>
+        <p:nvSpPr>
+          <p:cNvPr id="15" name="TextBox 14"/>
+          <p:cNvSpPr txBox="1"/>
+          <p:nvPr/>
+        </p:nvSpPr>
+        <p:spPr>
+          <a:xfrm>
+            <a:off x="914400" y="3758184"/>
+            <a:ext cx="164592" cy="210312"/>
+          </a:xfrm>
+          <a:prstGeom prst="rect">
+            <a:avLst/>
+          </a:prstGeom>
+          <a:noFill/>
+        </p:spPr>
+        <p:txBody>
+          <a:bodyPr wrap="square" anchor="t">
+            <a:spAutoFit/>
+          </a:bodyPr>
+          <a:lstStyle/>
+          <a:p>
+            <a:pPr algn="l"/>
+            <a:r>
+              <a:rPr sz="1600" b="1">
+                <a:solidFill>
+                  <a:srgbClr val="B74F2A"/>
+                </a:solidFill>
+                <a:latin typeface="Aptos"/>
+              </a:rPr>
+              <a:t>•</a:t>
+            </a:r>
+          </a:p>
+        </p:txBody>
+      </p:sp>
+      <p:sp>
+        <p:nvSpPr>
+          <p:cNvPr id="16" name="TextBox 15"/>
+          <p:cNvSpPr txBox="1"/>
+          <p:nvPr/>
+        </p:nvSpPr>
+        <p:spPr>
+          <a:xfrm>
+            <a:off x="1143000" y="3758184"/>
+            <a:ext cx="2761488" cy="438912"/>
+          </a:xfrm>
+          <a:prstGeom prst="rect">
+            <a:avLst/>
+          </a:prstGeom>
+          <a:noFill/>
+        </p:spPr>
+        <p:txBody>
+          <a:bodyPr wrap="square" anchor="t">
+            <a:spAutoFit/>
+          </a:bodyPr>
+          <a:lstStyle/>
+          <a:p>
+            <a:pPr algn="l"/>
+            <a:r>
+              <a:rPr sz="1300" b="0">
+                <a:solidFill>
+                  <a:srgbClr val="62584D"/>
+                </a:solidFill>
+                <a:latin typeface="Aptos"/>
+              </a:rPr>
+              <a:t>Pas d'entraînement ni de paramètre de rappel à régler.</a:t>
+            </a:r>
+          </a:p>
+        </p:txBody>
+      </p:sp>
+      <p:sp>
+        <p:nvSpPr>
+          <p:cNvPr id="17" name="Rounded Rectangle 16"/>
           <p:cNvSpPr/>
           <p:nvPr/>
         </p:nvSpPr>
         <p:spPr>
           <a:xfrm>
-            <a:off x="1143000" y="1783080"/>
-            <a:ext cx="2057400" cy="713232"/>
-          </a:xfrm>
-          <a:prstGeom prst="roundRect">
-            <a:avLst>
-              <a:gd name="adj" fmla="val 12000"/>
-            </a:avLst>
-          </a:prstGeom>
-          <a:solidFill>
-            <a:srgbClr val="B74F2A"/>
-          </a:solidFill>
-          <a:ln>
-            <a:solidFill>
-              <a:srgbClr val="B74F2A"/>
-            </a:solidFill>
-          </a:ln>
-        </p:spPr>
-        <p:style>
-          <a:lnRef idx="1">
-            <a:schemeClr val="accent1"/>
-          </a:lnRef>
-          <a:fillRef idx="3">
-            <a:schemeClr val="accent1"/>
-          </a:fillRef>
-          <a:effectRef idx="2">
-            <a:schemeClr val="accent1"/>
-          </a:effectRef>
-          <a:fontRef idx="minor">
-            <a:schemeClr val="lt1"/>
-          </a:fontRef>
-        </p:style>
-        <p:txBody>
-          <a:bodyPr rtlCol="0" anchor="ctr"/>
-          <a:lstStyle/>
-          <a:p>
-            <a:pPr algn="ctr"/>
-          </a:p>
-        </p:txBody>
-      </p:sp>
-      <p:sp>
-        <p:nvSpPr>
-          <p:cNvPr id="11" name="TextBox 10"/>
-          <p:cNvSpPr txBox="1"/>
-          <p:nvPr/>
-        </p:nvSpPr>
-        <p:spPr>
-          <a:xfrm>
-            <a:off x="1325880" y="2011680"/>
-            <a:ext cx="1691640" cy="210312"/>
-          </a:xfrm>
-          <a:prstGeom prst="rect">
-            <a:avLst/>
-          </a:prstGeom>
-          <a:noFill/>
-        </p:spPr>
-        <p:txBody>
-          <a:bodyPr wrap="square" anchor="t">
-            <a:spAutoFit/>
-          </a:bodyPr>
-          <a:lstStyle/>
-          <a:p>
-            <a:pPr algn="ctr"/>
-            <a:r>
-              <a:rPr sz="1400" b="1">
-                <a:solidFill>
-                  <a:srgbClr val="FFFFFF"/>
-                </a:solidFill>
-                <a:latin typeface="Aptos"/>
-              </a:rPr>
-              <a:t>1. Ingestion</a:t>
-            </a:r>
-          </a:p>
-        </p:txBody>
-      </p:sp>
-      <p:sp>
-        <p:nvSpPr>
-          <p:cNvPr id="12" name="TextBox 11"/>
-          <p:cNvSpPr txBox="1"/>
-          <p:nvPr/>
-        </p:nvSpPr>
-        <p:spPr>
-          <a:xfrm>
-            <a:off x="3474720" y="1929384"/>
-            <a:ext cx="7223760" cy="420624"/>
-          </a:xfrm>
-          <a:prstGeom prst="rect">
-            <a:avLst/>
-          </a:prstGeom>
-          <a:noFill/>
-        </p:spPr>
-        <p:txBody>
-          <a:bodyPr wrap="square" anchor="t">
-            <a:spAutoFit/>
-          </a:bodyPr>
-          <a:lstStyle/>
-          <a:p>
-            <a:pPr algn="l"/>
-            <a:r>
-              <a:rPr sz="1300" b="0">
-                <a:solidFill>
-                  <a:srgbClr val="1F1B16"/>
-                </a:solidFill>
-                <a:latin typeface="Aptos"/>
-              </a:rPr>
-              <a:t>scripts/fetch_openagenda_events.py
-OpenAgenda → JSONL</a:t>
-            </a:r>
-          </a:p>
-        </p:txBody>
-      </p:sp>
-      <p:sp>
-        <p:nvSpPr>
-          <p:cNvPr id="13" name="Rounded Rectangle 12"/>
-          <p:cNvSpPr/>
-          <p:nvPr/>
-        </p:nvSpPr>
-        <p:spPr>
-          <a:xfrm>
-            <a:off x="1143000" y="2807208"/>
-            <a:ext cx="9921240" cy="713232"/>
+            <a:off x="4343400" y="1828800"/>
+            <a:ext cx="3520440" cy="3611880"/>
           </a:xfrm>
           <a:prstGeom prst="roundRect">
             <a:avLst>
@@ -12363,132 +12671,259 @@
       </p:sp>
       <p:sp>
         <p:nvSpPr>
-          <p:cNvPr id="14" name="Rounded Rectangle 13"/>
+          <p:cNvPr id="18" name="TextBox 17"/>
+          <p:cNvSpPr txBox="1"/>
+          <p:nvPr/>
+        </p:nvSpPr>
+        <p:spPr>
+          <a:xfrm>
+            <a:off x="4599432" y="2048256"/>
+            <a:ext cx="3008376" cy="320040"/>
+          </a:xfrm>
+          <a:prstGeom prst="rect">
+            <a:avLst/>
+          </a:prstGeom>
+          <a:noFill/>
+        </p:spPr>
+        <p:txBody>
+          <a:bodyPr wrap="square" anchor="t">
+            <a:spAutoFit/>
+          </a:bodyPr>
+          <a:lstStyle/>
+          <a:p>
+            <a:pPr algn="l"/>
+            <a:r>
+              <a:rPr sz="1600" b="1">
+                <a:solidFill>
+                  <a:srgbClr val="1F1B16"/>
+                </a:solidFill>
+                <a:latin typeface="Aptos"/>
+              </a:rPr>
+              <a:t>Pourquoi pas IVF ?</a:t>
+            </a:r>
+          </a:p>
+        </p:txBody>
+      </p:sp>
+      <p:sp>
+        <p:nvSpPr>
+          <p:cNvPr id="19" name="TextBox 18"/>
+          <p:cNvSpPr txBox="1"/>
+          <p:nvPr/>
+        </p:nvSpPr>
+        <p:spPr>
+          <a:xfrm>
+            <a:off x="4617720" y="2514600"/>
+            <a:ext cx="164592" cy="210312"/>
+          </a:xfrm>
+          <a:prstGeom prst="rect">
+            <a:avLst/>
+          </a:prstGeom>
+          <a:noFill/>
+        </p:spPr>
+        <p:txBody>
+          <a:bodyPr wrap="square" anchor="t">
+            <a:spAutoFit/>
+          </a:bodyPr>
+          <a:lstStyle/>
+          <a:p>
+            <a:pPr algn="l"/>
+            <a:r>
+              <a:rPr sz="1600" b="1">
+                <a:solidFill>
+                  <a:srgbClr val="235F45"/>
+                </a:solidFill>
+                <a:latin typeface="Aptos"/>
+              </a:rPr>
+              <a:t>•</a:t>
+            </a:r>
+          </a:p>
+        </p:txBody>
+      </p:sp>
+      <p:sp>
+        <p:nvSpPr>
+          <p:cNvPr id="20" name="TextBox 19"/>
+          <p:cNvSpPr txBox="1"/>
+          <p:nvPr/>
+        </p:nvSpPr>
+        <p:spPr>
+          <a:xfrm>
+            <a:off x="4846320" y="2514600"/>
+            <a:ext cx="2761488" cy="438912"/>
+          </a:xfrm>
+          <a:prstGeom prst="rect">
+            <a:avLst/>
+          </a:prstGeom>
+          <a:noFill/>
+        </p:spPr>
+        <p:txBody>
+          <a:bodyPr wrap="square" anchor="t">
+            <a:spAutoFit/>
+          </a:bodyPr>
+          <a:lstStyle/>
+          <a:p>
+            <a:pPr algn="l"/>
+            <a:r>
+              <a:rPr sz="1300" b="0">
+                <a:solidFill>
+                  <a:srgbClr val="62584D"/>
+                </a:solidFill>
+                <a:latin typeface="Aptos"/>
+              </a:rPr>
+              <a:t>Adapté à une volumétrie plus élevée.</a:t>
+            </a:r>
+          </a:p>
+        </p:txBody>
+      </p:sp>
+      <p:sp>
+        <p:nvSpPr>
+          <p:cNvPr id="21" name="TextBox 20"/>
+          <p:cNvSpPr txBox="1"/>
+          <p:nvPr/>
+        </p:nvSpPr>
+        <p:spPr>
+          <a:xfrm>
+            <a:off x="4617720" y="3136392"/>
+            <a:ext cx="164592" cy="210312"/>
+          </a:xfrm>
+          <a:prstGeom prst="rect">
+            <a:avLst/>
+          </a:prstGeom>
+          <a:noFill/>
+        </p:spPr>
+        <p:txBody>
+          <a:bodyPr wrap="square" anchor="t">
+            <a:spAutoFit/>
+          </a:bodyPr>
+          <a:lstStyle/>
+          <a:p>
+            <a:pPr algn="l"/>
+            <a:r>
+              <a:rPr sz="1600" b="1">
+                <a:solidFill>
+                  <a:srgbClr val="235F45"/>
+                </a:solidFill>
+                <a:latin typeface="Aptos"/>
+              </a:rPr>
+              <a:t>•</a:t>
+            </a:r>
+          </a:p>
+        </p:txBody>
+      </p:sp>
+      <p:sp>
+        <p:nvSpPr>
+          <p:cNvPr id="22" name="TextBox 21"/>
+          <p:cNvSpPr txBox="1"/>
+          <p:nvPr/>
+        </p:nvSpPr>
+        <p:spPr>
+          <a:xfrm>
+            <a:off x="4846320" y="3136392"/>
+            <a:ext cx="2761488" cy="438912"/>
+          </a:xfrm>
+          <a:prstGeom prst="rect">
+            <a:avLst/>
+          </a:prstGeom>
+          <a:noFill/>
+        </p:spPr>
+        <p:txBody>
+          <a:bodyPr wrap="square" anchor="t">
+            <a:spAutoFit/>
+          </a:bodyPr>
+          <a:lstStyle/>
+          <a:p>
+            <a:pPr algn="l"/>
+            <a:r>
+              <a:rPr sz="1300" b="0">
+                <a:solidFill>
+                  <a:srgbClr val="62584D"/>
+                </a:solidFill>
+                <a:latin typeface="Aptos"/>
+              </a:rPr>
+              <a:t>Entraînement et réglages nlist / nprobe requis.</a:t>
+            </a:r>
+          </a:p>
+        </p:txBody>
+      </p:sp>
+      <p:sp>
+        <p:nvSpPr>
+          <p:cNvPr id="23" name="TextBox 22"/>
+          <p:cNvSpPr txBox="1"/>
+          <p:nvPr/>
+        </p:nvSpPr>
+        <p:spPr>
+          <a:xfrm>
+            <a:off x="4617720" y="3758184"/>
+            <a:ext cx="164592" cy="210312"/>
+          </a:xfrm>
+          <a:prstGeom prst="rect">
+            <a:avLst/>
+          </a:prstGeom>
+          <a:noFill/>
+        </p:spPr>
+        <p:txBody>
+          <a:bodyPr wrap="square" anchor="t">
+            <a:spAutoFit/>
+          </a:bodyPr>
+          <a:lstStyle/>
+          <a:p>
+            <a:pPr algn="l"/>
+            <a:r>
+              <a:rPr sz="1600" b="1">
+                <a:solidFill>
+                  <a:srgbClr val="235F45"/>
+                </a:solidFill>
+                <a:latin typeface="Aptos"/>
+              </a:rPr>
+              <a:t>•</a:t>
+            </a:r>
+          </a:p>
+        </p:txBody>
+      </p:sp>
+      <p:sp>
+        <p:nvSpPr>
+          <p:cNvPr id="24" name="TextBox 23"/>
+          <p:cNvSpPr txBox="1"/>
+          <p:nvPr/>
+        </p:nvSpPr>
+        <p:spPr>
+          <a:xfrm>
+            <a:off x="4846320" y="3758184"/>
+            <a:ext cx="2761488" cy="438912"/>
+          </a:xfrm>
+          <a:prstGeom prst="rect">
+            <a:avLst/>
+          </a:prstGeom>
+          <a:noFill/>
+        </p:spPr>
+        <p:txBody>
+          <a:bodyPr wrap="square" anchor="t">
+            <a:spAutoFit/>
+          </a:bodyPr>
+          <a:lstStyle/>
+          <a:p>
+            <a:pPr algn="l"/>
+            <a:r>
+              <a:rPr sz="1300" b="0">
+                <a:solidFill>
+                  <a:srgbClr val="62584D"/>
+                </a:solidFill>
+                <a:latin typeface="Aptos"/>
+              </a:rPr>
+              <a:t>Recherche approchée : un bon chunk peut être manqué.</a:t>
+            </a:r>
+          </a:p>
+        </p:txBody>
+      </p:sp>
+      <p:sp>
+        <p:nvSpPr>
+          <p:cNvPr id="25" name="Rounded Rectangle 24"/>
           <p:cNvSpPr/>
           <p:nvPr/>
         </p:nvSpPr>
         <p:spPr>
           <a:xfrm>
-            <a:off x="1143000" y="2807208"/>
-            <a:ext cx="2057400" cy="713232"/>
-          </a:xfrm>
-          <a:prstGeom prst="roundRect">
-            <a:avLst>
-              <a:gd name="adj" fmla="val 12000"/>
-            </a:avLst>
-          </a:prstGeom>
-          <a:solidFill>
-            <a:srgbClr val="235F45"/>
-          </a:solidFill>
-          <a:ln>
-            <a:solidFill>
-              <a:srgbClr val="235F45"/>
-            </a:solidFill>
-          </a:ln>
-        </p:spPr>
-        <p:style>
-          <a:lnRef idx="1">
-            <a:schemeClr val="accent1"/>
-          </a:lnRef>
-          <a:fillRef idx="3">
-            <a:schemeClr val="accent1"/>
-          </a:fillRef>
-          <a:effectRef idx="2">
-            <a:schemeClr val="accent1"/>
-          </a:effectRef>
-          <a:fontRef idx="minor">
-            <a:schemeClr val="lt1"/>
-          </a:fontRef>
-        </p:style>
-        <p:txBody>
-          <a:bodyPr rtlCol="0" anchor="ctr"/>
-          <a:lstStyle/>
-          <a:p>
-            <a:pPr algn="ctr"/>
-          </a:p>
-        </p:txBody>
-      </p:sp>
-      <p:sp>
-        <p:nvSpPr>
-          <p:cNvPr id="15" name="TextBox 14"/>
-          <p:cNvSpPr txBox="1"/>
-          <p:nvPr/>
-        </p:nvSpPr>
-        <p:spPr>
-          <a:xfrm>
-            <a:off x="1325880" y="3035808"/>
-            <a:ext cx="1691640" cy="210312"/>
-          </a:xfrm>
-          <a:prstGeom prst="rect">
-            <a:avLst/>
-          </a:prstGeom>
-          <a:noFill/>
-        </p:spPr>
-        <p:txBody>
-          <a:bodyPr wrap="square" anchor="t">
-            <a:spAutoFit/>
-          </a:bodyPr>
-          <a:lstStyle/>
-          <a:p>
-            <a:pPr algn="ctr"/>
-            <a:r>
-              <a:rPr sz="1400" b="1">
-                <a:solidFill>
-                  <a:srgbClr val="FFFFFF"/>
-                </a:solidFill>
-                <a:latin typeface="Aptos"/>
-              </a:rPr>
-              <a:t>2. Indexation</a:t>
-            </a:r>
-          </a:p>
-        </p:txBody>
-      </p:sp>
-      <p:sp>
-        <p:nvSpPr>
-          <p:cNvPr id="16" name="TextBox 15"/>
-          <p:cNvSpPr txBox="1"/>
-          <p:nvPr/>
-        </p:nvSpPr>
-        <p:spPr>
-          <a:xfrm>
-            <a:off x="3474720" y="2953512"/>
-            <a:ext cx="7223760" cy="420624"/>
-          </a:xfrm>
-          <a:prstGeom prst="rect">
-            <a:avLst/>
-          </a:prstGeom>
-          <a:noFill/>
-        </p:spPr>
-        <p:txBody>
-          <a:bodyPr wrap="square" anchor="t">
-            <a:spAutoFit/>
-          </a:bodyPr>
-          <a:lstStyle/>
-          <a:p>
-            <a:pPr algn="l"/>
-            <a:r>
-              <a:rPr sz="1300" b="0">
-                <a:solidFill>
-                  <a:srgbClr val="1F1B16"/>
-                </a:solidFill>
-                <a:latin typeface="Aptos"/>
-              </a:rPr>
-              <a:t>build_faiss_index.py
-Chunks + embeddings → FAISS</a:t>
-            </a:r>
-          </a:p>
-        </p:txBody>
-      </p:sp>
-      <p:sp>
-        <p:nvSpPr>
-          <p:cNvPr id="17" name="Rounded Rectangle 16"/>
-          <p:cNvSpPr/>
-          <p:nvPr/>
-        </p:nvSpPr>
-        <p:spPr>
-          <a:xfrm>
-            <a:off x="1143000" y="3831336"/>
-            <a:ext cx="9921240" cy="713232"/>
+            <a:off x="8046720" y="1828800"/>
+            <a:ext cx="3520440" cy="3611880"/>
           </a:xfrm>
           <a:prstGeom prst="roundRect">
             <a:avLst>
@@ -12528,96 +12963,84 @@
       </p:sp>
       <p:sp>
         <p:nvSpPr>
-          <p:cNvPr id="18" name="Rounded Rectangle 17"/>
-          <p:cNvSpPr/>
-          <p:nvPr/>
-        </p:nvSpPr>
-        <p:spPr>
-          <a:xfrm>
-            <a:off x="1143000" y="3831336"/>
-            <a:ext cx="2057400" cy="713232"/>
-          </a:xfrm>
-          <a:prstGeom prst="roundRect">
-            <a:avLst>
-              <a:gd name="adj" fmla="val 12000"/>
-            </a:avLst>
-          </a:prstGeom>
-          <a:solidFill>
-            <a:srgbClr val="B74F2A"/>
-          </a:solidFill>
-          <a:ln>
-            <a:solidFill>
-              <a:srgbClr val="B74F2A"/>
-            </a:solidFill>
-          </a:ln>
-        </p:spPr>
-        <p:style>
-          <a:lnRef idx="1">
-            <a:schemeClr val="accent1"/>
-          </a:lnRef>
-          <a:fillRef idx="3">
-            <a:schemeClr val="accent1"/>
-          </a:fillRef>
-          <a:effectRef idx="2">
-            <a:schemeClr val="accent1"/>
-          </a:effectRef>
-          <a:fontRef idx="minor">
-            <a:schemeClr val="lt1"/>
-          </a:fontRef>
-        </p:style>
-        <p:txBody>
-          <a:bodyPr rtlCol="0" anchor="ctr"/>
-          <a:lstStyle/>
-          <a:p>
-            <a:pPr algn="ctr"/>
-          </a:p>
-        </p:txBody>
-      </p:sp>
-      <p:sp>
-        <p:nvSpPr>
-          <p:cNvPr id="19" name="TextBox 18"/>
-          <p:cNvSpPr txBox="1"/>
-          <p:nvPr/>
-        </p:nvSpPr>
-        <p:spPr>
-          <a:xfrm>
-            <a:off x="1325880" y="4059936"/>
-            <a:ext cx="1691640" cy="210312"/>
-          </a:xfrm>
-          <a:prstGeom prst="rect">
-            <a:avLst/>
-          </a:prstGeom>
-          <a:noFill/>
-        </p:spPr>
-        <p:txBody>
-          <a:bodyPr wrap="square" anchor="t">
-            <a:spAutoFit/>
-          </a:bodyPr>
-          <a:lstStyle/>
-          <a:p>
-            <a:pPr algn="ctr"/>
-            <a:r>
-              <a:rPr sz="1400" b="1">
-                <a:solidFill>
-                  <a:srgbClr val="FFFFFF"/>
-                </a:solidFill>
-                <a:latin typeface="Aptos"/>
-              </a:rPr>
-              <a:t>3. Service de recherche</a:t>
-            </a:r>
-          </a:p>
-        </p:txBody>
-      </p:sp>
-      <p:sp>
-        <p:nvSpPr>
-          <p:cNvPr id="20" name="TextBox 19"/>
-          <p:cNvSpPr txBox="1"/>
-          <p:nvPr/>
-        </p:nvSpPr>
-        <p:spPr>
-          <a:xfrm>
-            <a:off x="3474720" y="3977640"/>
-            <a:ext cx="7223760" cy="420624"/>
+          <p:cNvPr id="26" name="TextBox 25"/>
+          <p:cNvSpPr txBox="1"/>
+          <p:nvPr/>
+        </p:nvSpPr>
+        <p:spPr>
+          <a:xfrm>
+            <a:off x="8302752" y="2048256"/>
+            <a:ext cx="3008376" cy="320040"/>
+          </a:xfrm>
+          <a:prstGeom prst="rect">
+            <a:avLst/>
+          </a:prstGeom>
+          <a:noFill/>
+        </p:spPr>
+        <p:txBody>
+          <a:bodyPr wrap="square" anchor="t">
+            <a:spAutoFit/>
+          </a:bodyPr>
+          <a:lstStyle/>
+          <a:p>
+            <a:pPr algn="l"/>
+            <a:r>
+              <a:rPr sz="1600" b="1">
+                <a:solidFill>
+                  <a:srgbClr val="1F1B16"/>
+                </a:solidFill>
+                <a:latin typeface="Aptos"/>
+              </a:rPr>
+              <a:t>Pourquoi pas HNSW ?</a:t>
+            </a:r>
+          </a:p>
+        </p:txBody>
+      </p:sp>
+      <p:sp>
+        <p:nvSpPr>
+          <p:cNvPr id="27" name="TextBox 26"/>
+          <p:cNvSpPr txBox="1"/>
+          <p:nvPr/>
+        </p:nvSpPr>
+        <p:spPr>
+          <a:xfrm>
+            <a:off x="8321040" y="2514600"/>
+            <a:ext cx="164592" cy="210312"/>
+          </a:xfrm>
+          <a:prstGeom prst="rect">
+            <a:avLst/>
+          </a:prstGeom>
+          <a:noFill/>
+        </p:spPr>
+        <p:txBody>
+          <a:bodyPr wrap="square" anchor="t">
+            <a:spAutoFit/>
+          </a:bodyPr>
+          <a:lstStyle/>
+          <a:p>
+            <a:pPr algn="l"/>
+            <a:r>
+              <a:rPr sz="1600" b="1">
+                <a:solidFill>
+                  <a:srgbClr val="B74F2A"/>
+                </a:solidFill>
+                <a:latin typeface="Aptos"/>
+              </a:rPr>
+              <a:t>•</a:t>
+            </a:r>
+          </a:p>
+        </p:txBody>
+      </p:sp>
+      <p:sp>
+        <p:nvSpPr>
+          <p:cNvPr id="28" name="TextBox 27"/>
+          <p:cNvSpPr txBox="1"/>
+          <p:nvPr/>
+        </p:nvSpPr>
+        <p:spPr>
+          <a:xfrm>
+            <a:off x="8549640" y="2514600"/>
+            <a:ext cx="2761488" cy="438912"/>
           </a:xfrm>
           <a:prstGeom prst="rect">
             <a:avLst/>
@@ -12634,155 +13057,60 @@
             <a:r>
               <a:rPr sz="1300" b="0">
                 <a:solidFill>
-                  <a:srgbClr val="1F1B16"/>
-                </a:solidFill>
-                <a:latin typeface="Aptos"/>
-              </a:rPr>
-              <a:t>rag_service.py
-Recherche, filtrage, contexte, réponse</a:t>
-            </a:r>
-          </a:p>
-        </p:txBody>
-      </p:sp>
-      <p:sp>
-        <p:nvSpPr>
-          <p:cNvPr id="21" name="Rounded Rectangle 20"/>
-          <p:cNvSpPr/>
-          <p:nvPr/>
-        </p:nvSpPr>
-        <p:spPr>
-          <a:xfrm>
-            <a:off x="1143000" y="4855464"/>
-            <a:ext cx="9921240" cy="713232"/>
-          </a:xfrm>
-          <a:prstGeom prst="roundRect">
-            <a:avLst>
-              <a:gd name="adj" fmla="val 12000"/>
-            </a:avLst>
-          </a:prstGeom>
-          <a:solidFill>
-            <a:srgbClr val="FFFAF2"/>
-          </a:solidFill>
-          <a:ln>
-            <a:solidFill>
-              <a:srgbClr val="E1D5C7"/>
-            </a:solidFill>
-          </a:ln>
-        </p:spPr>
-        <p:style>
-          <a:lnRef idx="1">
-            <a:schemeClr val="accent1"/>
-          </a:lnRef>
-          <a:fillRef idx="3">
-            <a:schemeClr val="accent1"/>
-          </a:fillRef>
-          <a:effectRef idx="2">
-            <a:schemeClr val="accent1"/>
-          </a:effectRef>
-          <a:fontRef idx="minor">
-            <a:schemeClr val="lt1"/>
-          </a:fontRef>
-        </p:style>
-        <p:txBody>
-          <a:bodyPr rtlCol="0" anchor="ctr"/>
-          <a:lstStyle/>
-          <a:p>
-            <a:pPr algn="ctr"/>
-          </a:p>
-        </p:txBody>
-      </p:sp>
-      <p:sp>
-        <p:nvSpPr>
-          <p:cNvPr id="22" name="Rounded Rectangle 21"/>
-          <p:cNvSpPr/>
-          <p:nvPr/>
-        </p:nvSpPr>
-        <p:spPr>
-          <a:xfrm>
-            <a:off x="1143000" y="4855464"/>
-            <a:ext cx="2057400" cy="713232"/>
-          </a:xfrm>
-          <a:prstGeom prst="roundRect">
-            <a:avLst>
-              <a:gd name="adj" fmla="val 12000"/>
-            </a:avLst>
-          </a:prstGeom>
-          <a:solidFill>
-            <a:srgbClr val="235F45"/>
-          </a:solidFill>
-          <a:ln>
-            <a:solidFill>
-              <a:srgbClr val="235F45"/>
-            </a:solidFill>
-          </a:ln>
-        </p:spPr>
-        <p:style>
-          <a:lnRef idx="1">
-            <a:schemeClr val="accent1"/>
-          </a:lnRef>
-          <a:fillRef idx="3">
-            <a:schemeClr val="accent1"/>
-          </a:fillRef>
-          <a:effectRef idx="2">
-            <a:schemeClr val="accent1"/>
-          </a:effectRef>
-          <a:fontRef idx="minor">
-            <a:schemeClr val="lt1"/>
-          </a:fontRef>
-        </p:style>
-        <p:txBody>
-          <a:bodyPr rtlCol="0" anchor="ctr"/>
-          <a:lstStyle/>
-          <a:p>
-            <a:pPr algn="ctr"/>
-          </a:p>
-        </p:txBody>
-      </p:sp>
-      <p:sp>
-        <p:nvSpPr>
-          <p:cNvPr id="23" name="TextBox 22"/>
-          <p:cNvSpPr txBox="1"/>
-          <p:nvPr/>
-        </p:nvSpPr>
-        <p:spPr>
-          <a:xfrm>
-            <a:off x="1325880" y="5084064"/>
-            <a:ext cx="1691640" cy="210312"/>
-          </a:xfrm>
-          <a:prstGeom prst="rect">
-            <a:avLst/>
-          </a:prstGeom>
-          <a:noFill/>
-        </p:spPr>
-        <p:txBody>
-          <a:bodyPr wrap="square" anchor="t">
-            <a:spAutoFit/>
-          </a:bodyPr>
-          <a:lstStyle/>
-          <a:p>
-            <a:pPr algn="ctr"/>
-            <a:r>
-              <a:rPr sz="1400" b="1">
-                <a:solidFill>
-                  <a:srgbClr val="FFFFFF"/>
-                </a:solidFill>
-                <a:latin typeface="Aptos"/>
-              </a:rPr>
-              <a:t>4. API</a:t>
-            </a:r>
-          </a:p>
-        </p:txBody>
-      </p:sp>
-      <p:sp>
-        <p:nvSpPr>
-          <p:cNvPr id="24" name="TextBox 23"/>
-          <p:cNvSpPr txBox="1"/>
-          <p:nvPr/>
-        </p:nvSpPr>
-        <p:spPr>
-          <a:xfrm>
-            <a:off x="3474720" y="5001768"/>
-            <a:ext cx="7223760" cy="420624"/>
+                  <a:srgbClr val="62584D"/>
+                </a:solidFill>
+                <a:latin typeface="Aptos"/>
+              </a:rPr>
+              <a:t>Très faible latence à grande échelle.</a:t>
+            </a:r>
+          </a:p>
+        </p:txBody>
+      </p:sp>
+      <p:sp>
+        <p:nvSpPr>
+          <p:cNvPr id="29" name="TextBox 28"/>
+          <p:cNvSpPr txBox="1"/>
+          <p:nvPr/>
+        </p:nvSpPr>
+        <p:spPr>
+          <a:xfrm>
+            <a:off x="8321040" y="3136392"/>
+            <a:ext cx="164592" cy="210312"/>
+          </a:xfrm>
+          <a:prstGeom prst="rect">
+            <a:avLst/>
+          </a:prstGeom>
+          <a:noFill/>
+        </p:spPr>
+        <p:txBody>
+          <a:bodyPr wrap="square" anchor="t">
+            <a:spAutoFit/>
+          </a:bodyPr>
+          <a:lstStyle/>
+          <a:p>
+            <a:pPr algn="l"/>
+            <a:r>
+              <a:rPr sz="1600" b="1">
+                <a:solidFill>
+                  <a:srgbClr val="B74F2A"/>
+                </a:solidFill>
+                <a:latin typeface="Aptos"/>
+              </a:rPr>
+              <a:t>•</a:t>
+            </a:r>
+          </a:p>
+        </p:txBody>
+      </p:sp>
+      <p:sp>
+        <p:nvSpPr>
+          <p:cNvPr id="30" name="TextBox 29"/>
+          <p:cNvSpPr txBox="1"/>
+          <p:nvPr/>
+        </p:nvSpPr>
+        <p:spPr>
+          <a:xfrm>
+            <a:off x="8549640" y="3136392"/>
+            <a:ext cx="2761488" cy="438912"/>
           </a:xfrm>
           <a:prstGeom prst="rect">
             <a:avLst/>
@@ -12799,12 +13127,81 @@
             <a:r>
               <a:rPr sz="1300" b="0">
                 <a:solidFill>
-                  <a:srgbClr val="1F1B16"/>
-                </a:solidFill>
-                <a:latin typeface="Aptos"/>
-              </a:rPr>
-              <a:t>api.py · FastAPI
-/health · /ask · /rebuild</a:t>
+                  <a:srgbClr val="62584D"/>
+                </a:solidFill>
+                <a:latin typeface="Aptos"/>
+              </a:rPr>
+              <a:t>Plus de mémoire et plus de paramètres à régler.</a:t>
+            </a:r>
+          </a:p>
+        </p:txBody>
+      </p:sp>
+      <p:sp>
+        <p:nvSpPr>
+          <p:cNvPr id="31" name="TextBox 30"/>
+          <p:cNvSpPr txBox="1"/>
+          <p:nvPr/>
+        </p:nvSpPr>
+        <p:spPr>
+          <a:xfrm>
+            <a:off x="8321040" y="3758184"/>
+            <a:ext cx="164592" cy="210312"/>
+          </a:xfrm>
+          <a:prstGeom prst="rect">
+            <a:avLst/>
+          </a:prstGeom>
+          <a:noFill/>
+        </p:spPr>
+        <p:txBody>
+          <a:bodyPr wrap="square" anchor="t">
+            <a:spAutoFit/>
+          </a:bodyPr>
+          <a:lstStyle/>
+          <a:p>
+            <a:pPr algn="l"/>
+            <a:r>
+              <a:rPr sz="1600" b="1">
+                <a:solidFill>
+                  <a:srgbClr val="B74F2A"/>
+                </a:solidFill>
+                <a:latin typeface="Aptos"/>
+              </a:rPr>
+              <a:t>•</a:t>
+            </a:r>
+          </a:p>
+        </p:txBody>
+      </p:sp>
+      <p:sp>
+        <p:nvSpPr>
+          <p:cNvPr id="32" name="TextBox 31"/>
+          <p:cNvSpPr txBox="1"/>
+          <p:nvPr/>
+        </p:nvSpPr>
+        <p:spPr>
+          <a:xfrm>
+            <a:off x="8549640" y="3758184"/>
+            <a:ext cx="2761488" cy="438912"/>
+          </a:xfrm>
+          <a:prstGeom prst="rect">
+            <a:avLst/>
+          </a:prstGeom>
+          <a:noFill/>
+        </p:spPr>
+        <p:txBody>
+          <a:bodyPr wrap="square" anchor="t">
+            <a:spAutoFit/>
+          </a:bodyPr>
+          <a:lstStyle/>
+          <a:p>
+            <a:pPr algn="l"/>
+            <a:r>
+              <a:rPr sz="1300" b="0">
+                <a:solidFill>
+                  <a:srgbClr val="62584D"/>
+                </a:solidFill>
+                <a:latin typeface="Aptos"/>
+              </a:rPr>
+              <a:t>Complexité non nécessaire pour ce POC local.</a:t>
             </a:r>
           </a:p>
         </p:txBody>
@@ -13060,7 +13457,7 @@
                 </a:solidFill>
                 <a:latin typeface="Aptos Display"/>
               </a:rPr>
-              <a:t>Les principaux choix techniques</a:t>
+              <a:t>Répondre à une question avec le RAG</a:t>
             </a:r>
           </a:p>
         </p:txBody>
@@ -13095,7 +13492,7 @@
                 </a:solidFill>
                 <a:latin typeface="Aptos"/>
               </a:rPr>
-              <a:t>Des outils simples à prendre en main, adaptés au volume de données du projet.</a:t>
+              <a:t>La génération ne part pas de zéro : elle s'appuie sur les chunks retrouvés dans l'index.</a:t>
             </a:r>
           </a:p>
         </p:txBody>
@@ -13108,8 +13505,8 @@
         </p:nvSpPr>
         <p:spPr>
           <a:xfrm>
-            <a:off x="640080" y="1828800"/>
-            <a:ext cx="3520440" cy="3611880"/>
+            <a:off x="438912" y="2240280"/>
+            <a:ext cx="1965960" cy="1691640"/>
           </a:xfrm>
           <a:prstGeom prst="roundRect">
             <a:avLst>
@@ -13117,11 +13514,11 @@
             </a:avLst>
           </a:prstGeom>
           <a:solidFill>
-            <a:srgbClr val="FFFAF2"/>
+            <a:srgbClr val="B74F2A"/>
           </a:solidFill>
           <a:ln>
             <a:solidFill>
-              <a:srgbClr val="E1D5C7"/>
+              <a:srgbClr val="B74F2A"/>
             </a:solidFill>
           </a:ln>
         </p:spPr>
@@ -13155,29 +13552,29 @@
         </p:nvSpPr>
         <p:spPr>
           <a:xfrm>
-            <a:off x="896112" y="2048256"/>
-            <a:ext cx="3008376" cy="320040"/>
-          </a:xfrm>
-          <a:prstGeom prst="rect">
-            <a:avLst/>
-          </a:prstGeom>
-          <a:noFill/>
-        </p:spPr>
-        <p:txBody>
-          <a:bodyPr wrap="square" anchor="t">
-            <a:spAutoFit/>
-          </a:bodyPr>
-          <a:lstStyle/>
-          <a:p>
-            <a:pPr algn="l"/>
+            <a:off x="585216" y="2523744"/>
+            <a:ext cx="1673352" cy="228600"/>
+          </a:xfrm>
+          <a:prstGeom prst="rect">
+            <a:avLst/>
+          </a:prstGeom>
+          <a:noFill/>
+        </p:spPr>
+        <p:txBody>
+          <a:bodyPr wrap="square" anchor="t">
+            <a:spAutoFit/>
+          </a:bodyPr>
+          <a:lstStyle/>
+          <a:p>
+            <a:pPr algn="ctr"/>
             <a:r>
               <a:rPr sz="1600" b="1">
                 <a:solidFill>
-                  <a:srgbClr val="1F1B16"/>
-                </a:solidFill>
-                <a:latin typeface="Aptos"/>
-              </a:rPr>
-              <a:t>Mistral</a:t>
+                  <a:srgbClr val="FFFFFF"/>
+                </a:solidFill>
+                <a:latin typeface="Aptos"/>
+              </a:rPr>
+              <a:t>Question</a:t>
             </a:r>
           </a:p>
         </p:txBody>
@@ -13190,29 +13587,30 @@
         </p:nvSpPr>
         <p:spPr>
           <a:xfrm>
-            <a:off x="914400" y="2514600"/>
-            <a:ext cx="164592" cy="210312"/>
-          </a:xfrm>
-          <a:prstGeom prst="rect">
-            <a:avLst/>
-          </a:prstGeom>
-          <a:noFill/>
-        </p:spPr>
-        <p:txBody>
-          <a:bodyPr wrap="square" anchor="t">
-            <a:spAutoFit/>
-          </a:bodyPr>
-          <a:lstStyle/>
-          <a:p>
-            <a:pPr algn="l"/>
-            <a:r>
-              <a:rPr sz="1600" b="1">
-                <a:solidFill>
-                  <a:srgbClr val="B74F2A"/>
-                </a:solidFill>
-                <a:latin typeface="Aptos"/>
-              </a:rPr>
-              <a:t>•</a:t>
+            <a:off x="585216" y="2971800"/>
+            <a:ext cx="1673352" cy="548640"/>
+          </a:xfrm>
+          <a:prstGeom prst="rect">
+            <a:avLst/>
+          </a:prstGeom>
+          <a:noFill/>
+        </p:spPr>
+        <p:txBody>
+          <a:bodyPr wrap="square" anchor="t">
+            <a:spAutoFit/>
+          </a:bodyPr>
+          <a:lstStyle/>
+          <a:p>
+            <a:pPr algn="ctr"/>
+            <a:r>
+              <a:rPr sz="1100" b="0">
+                <a:solidFill>
+                  <a:srgbClr val="FFFFFF"/>
+                </a:solidFill>
+                <a:latin typeface="Aptos"/>
+              </a:rPr>
+              <a:t>« Une exposition gratuite
+ce week-end ? »</a:t>
             </a:r>
           </a:p>
         </p:txBody>
@@ -13225,183 +13623,43 @@
         </p:nvSpPr>
         <p:spPr>
           <a:xfrm>
-            <a:off x="1143000" y="2514600"/>
-            <a:ext cx="2761488" cy="438912"/>
-          </a:xfrm>
-          <a:prstGeom prst="rect">
-            <a:avLst/>
-          </a:prstGeom>
-          <a:noFill/>
-        </p:spPr>
-        <p:txBody>
-          <a:bodyPr wrap="square" anchor="t">
-            <a:spAutoFit/>
-          </a:bodyPr>
-          <a:lstStyle/>
-          <a:p>
-            <a:pPr algn="l"/>
-            <a:r>
-              <a:rPr sz="1300" b="0">
-                <a:solidFill>
-                  <a:srgbClr val="62584D"/>
-                </a:solidFill>
-                <a:latin typeface="Aptos"/>
-              </a:rPr>
-              <a:t>mistral-embed pour comparer les textes.</a:t>
-            </a:r>
-          </a:p>
-        </p:txBody>
-      </p:sp>
-      <p:sp>
-        <p:nvSpPr>
-          <p:cNvPr id="13" name="TextBox 12"/>
-          <p:cNvSpPr txBox="1"/>
-          <p:nvPr/>
-        </p:nvSpPr>
-        <p:spPr>
-          <a:xfrm>
-            <a:off x="914400" y="3136392"/>
-            <a:ext cx="164592" cy="210312"/>
-          </a:xfrm>
-          <a:prstGeom prst="rect">
-            <a:avLst/>
-          </a:prstGeom>
-          <a:noFill/>
-        </p:spPr>
-        <p:txBody>
-          <a:bodyPr wrap="square" anchor="t">
-            <a:spAutoFit/>
-          </a:bodyPr>
-          <a:lstStyle/>
-          <a:p>
-            <a:pPr algn="l"/>
-            <a:r>
-              <a:rPr sz="1600" b="1">
-                <a:solidFill>
-                  <a:srgbClr val="B74F2A"/>
-                </a:solidFill>
-                <a:latin typeface="Aptos"/>
-              </a:rPr>
-              <a:t>•</a:t>
-            </a:r>
-          </a:p>
-        </p:txBody>
-      </p:sp>
-      <p:sp>
-        <p:nvSpPr>
-          <p:cNvPr id="14" name="TextBox 13"/>
-          <p:cNvSpPr txBox="1"/>
-          <p:nvPr/>
-        </p:nvSpPr>
-        <p:spPr>
-          <a:xfrm>
-            <a:off x="1143000" y="3136392"/>
-            <a:ext cx="2761488" cy="438912"/>
-          </a:xfrm>
-          <a:prstGeom prst="rect">
-            <a:avLst/>
-          </a:prstGeom>
-          <a:noFill/>
-        </p:spPr>
-        <p:txBody>
-          <a:bodyPr wrap="square" anchor="t">
-            <a:spAutoFit/>
-          </a:bodyPr>
-          <a:lstStyle/>
-          <a:p>
-            <a:pPr algn="l"/>
-            <a:r>
-              <a:rPr sz="1300" b="0">
-                <a:solidFill>
-                  <a:srgbClr val="62584D"/>
-                </a:solidFill>
-                <a:latin typeface="Aptos"/>
-              </a:rPr>
-              <a:t>mistral-small-latest pour rédiger la réponse.</a:t>
-            </a:r>
-          </a:p>
-        </p:txBody>
-      </p:sp>
-      <p:sp>
-        <p:nvSpPr>
-          <p:cNvPr id="15" name="TextBox 14"/>
-          <p:cNvSpPr txBox="1"/>
-          <p:nvPr/>
-        </p:nvSpPr>
-        <p:spPr>
-          <a:xfrm>
-            <a:off x="914400" y="3758184"/>
-            <a:ext cx="164592" cy="210312"/>
-          </a:xfrm>
-          <a:prstGeom prst="rect">
-            <a:avLst/>
-          </a:prstGeom>
-          <a:noFill/>
-        </p:spPr>
-        <p:txBody>
-          <a:bodyPr wrap="square" anchor="t">
-            <a:spAutoFit/>
-          </a:bodyPr>
-          <a:lstStyle/>
-          <a:p>
-            <a:pPr algn="l"/>
-            <a:r>
-              <a:rPr sz="1600" b="1">
-                <a:solidFill>
-                  <a:srgbClr val="B74F2A"/>
-                </a:solidFill>
-                <a:latin typeface="Aptos"/>
-              </a:rPr>
-              <a:t>•</a:t>
-            </a:r>
-          </a:p>
-        </p:txBody>
-      </p:sp>
-      <p:sp>
-        <p:nvSpPr>
-          <p:cNvPr id="16" name="TextBox 15"/>
-          <p:cNvSpPr txBox="1"/>
-          <p:nvPr/>
-        </p:nvSpPr>
-        <p:spPr>
-          <a:xfrm>
-            <a:off x="1143000" y="3758184"/>
-            <a:ext cx="2761488" cy="438912"/>
-          </a:xfrm>
-          <a:prstGeom prst="rect">
-            <a:avLst/>
-          </a:prstGeom>
-          <a:noFill/>
-        </p:spPr>
-        <p:txBody>
-          <a:bodyPr wrap="square" anchor="t">
-            <a:spAutoFit/>
-          </a:bodyPr>
-          <a:lstStyle/>
-          <a:p>
-            <a:pPr algn="l"/>
-            <a:r>
-              <a:rPr sz="1300" b="0">
-                <a:solidFill>
-                  <a:srgbClr val="62584D"/>
-                </a:solidFill>
-                <a:latin typeface="Aptos"/>
-              </a:rPr>
-              <a:t>Bon compromis coût / latence pour un POC.</a:t>
-            </a:r>
-          </a:p>
-        </p:txBody>
-      </p:sp>
-      <p:sp>
-        <p:nvSpPr>
-          <p:cNvPr id="17" name="Rounded Rectangle 16"/>
+            <a:off x="2432304" y="2852928"/>
+            <a:ext cx="274320" cy="228600"/>
+          </a:xfrm>
+          <a:prstGeom prst="rect">
+            <a:avLst/>
+          </a:prstGeom>
+          <a:noFill/>
+        </p:spPr>
+        <p:txBody>
+          <a:bodyPr wrap="square" anchor="t">
+            <a:spAutoFit/>
+          </a:bodyPr>
+          <a:lstStyle/>
+          <a:p>
+            <a:pPr algn="ctr"/>
+            <a:r>
+              <a:rPr sz="1800" b="1">
+                <a:solidFill>
+                  <a:srgbClr val="7F2F16"/>
+                </a:solidFill>
+                <a:latin typeface="Aptos"/>
+              </a:rPr>
+              <a:t>→</a:t>
+            </a:r>
+          </a:p>
+        </p:txBody>
+      </p:sp>
+      <p:sp>
+        <p:nvSpPr>
+          <p:cNvPr id="13" name="Rounded Rectangle 12"/>
           <p:cNvSpPr/>
           <p:nvPr/>
         </p:nvSpPr>
         <p:spPr>
           <a:xfrm>
-            <a:off x="4343400" y="1828800"/>
-            <a:ext cx="3520440" cy="3611880"/>
+            <a:off x="2788920" y="2240280"/>
+            <a:ext cx="1965960" cy="1691640"/>
           </a:xfrm>
           <a:prstGeom prst="roundRect">
             <a:avLst>
@@ -13409,11 +13667,11 @@
             </a:avLst>
           </a:prstGeom>
           <a:solidFill>
-            <a:srgbClr val="FFFAF2"/>
+            <a:srgbClr val="235F45"/>
           </a:solidFill>
           <a:ln>
             <a:solidFill>
-              <a:srgbClr val="E1D5C7"/>
+              <a:srgbClr val="235F45"/>
             </a:solidFill>
           </a:ln>
         </p:spPr>
@@ -13441,329 +13699,119 @@
       </p:sp>
       <p:sp>
         <p:nvSpPr>
-          <p:cNvPr id="18" name="TextBox 17"/>
-          <p:cNvSpPr txBox="1"/>
-          <p:nvPr/>
-        </p:nvSpPr>
-        <p:spPr>
-          <a:xfrm>
-            <a:off x="4599432" y="2048256"/>
-            <a:ext cx="3008376" cy="320040"/>
-          </a:xfrm>
-          <a:prstGeom prst="rect">
-            <a:avLst/>
-          </a:prstGeom>
-          <a:noFill/>
-        </p:spPr>
-        <p:txBody>
-          <a:bodyPr wrap="square" anchor="t">
-            <a:spAutoFit/>
-          </a:bodyPr>
-          <a:lstStyle/>
-          <a:p>
-            <a:pPr algn="l"/>
+          <p:cNvPr id="14" name="TextBox 13"/>
+          <p:cNvSpPr txBox="1"/>
+          <p:nvPr/>
+        </p:nvSpPr>
+        <p:spPr>
+          <a:xfrm>
+            <a:off x="2935224" y="2523744"/>
+            <a:ext cx="1673352" cy="228600"/>
+          </a:xfrm>
+          <a:prstGeom prst="rect">
+            <a:avLst/>
+          </a:prstGeom>
+          <a:noFill/>
+        </p:spPr>
+        <p:txBody>
+          <a:bodyPr wrap="square" anchor="t">
+            <a:spAutoFit/>
+          </a:bodyPr>
+          <a:lstStyle/>
+          <a:p>
+            <a:pPr algn="ctr"/>
             <a:r>
               <a:rPr sz="1600" b="1">
                 <a:solidFill>
-                  <a:srgbClr val="1F1B16"/>
-                </a:solidFill>
-                <a:latin typeface="Aptos"/>
-              </a:rPr>
-              <a:t>FAISS · IndexFlatIP</a:t>
-            </a:r>
-          </a:p>
-        </p:txBody>
-      </p:sp>
-      <p:sp>
-        <p:nvSpPr>
-          <p:cNvPr id="19" name="TextBox 18"/>
-          <p:cNvSpPr txBox="1"/>
-          <p:nvPr/>
-        </p:nvSpPr>
-        <p:spPr>
-          <a:xfrm>
-            <a:off x="4617720" y="2514600"/>
-            <a:ext cx="164592" cy="210312"/>
-          </a:xfrm>
-          <a:prstGeom prst="rect">
-            <a:avLst/>
-          </a:prstGeom>
-          <a:noFill/>
-        </p:spPr>
-        <p:txBody>
-          <a:bodyPr wrap="square" anchor="t">
-            <a:spAutoFit/>
-          </a:bodyPr>
-          <a:lstStyle/>
-          <a:p>
-            <a:pPr algn="l"/>
-            <a:r>
-              <a:rPr sz="1600" b="1">
-                <a:solidFill>
-                  <a:srgbClr val="235F45"/>
-                </a:solidFill>
-                <a:latin typeface="Aptos"/>
-              </a:rPr>
-              <a:t>•</a:t>
-            </a:r>
-          </a:p>
-        </p:txBody>
-      </p:sp>
-      <p:sp>
-        <p:nvSpPr>
-          <p:cNvPr id="20" name="TextBox 19"/>
-          <p:cNvSpPr txBox="1"/>
-          <p:nvPr/>
-        </p:nvSpPr>
-        <p:spPr>
-          <a:xfrm>
-            <a:off x="4846320" y="2514600"/>
-            <a:ext cx="2761488" cy="438912"/>
-          </a:xfrm>
-          <a:prstGeom prst="rect">
-            <a:avLst/>
-          </a:prstGeom>
-          <a:noFill/>
-        </p:spPr>
-        <p:txBody>
-          <a:bodyPr wrap="square" anchor="t">
-            <a:spAutoFit/>
-          </a:bodyPr>
-          <a:lstStyle/>
-          <a:p>
-            <a:pPr algn="l"/>
-            <a:r>
-              <a:rPr sz="1300" b="0">
-                <a:solidFill>
-                  <a:srgbClr val="62584D"/>
-                </a:solidFill>
-                <a:latin typeface="Aptos"/>
-              </a:rPr>
-              <a:t>Retenu : recherche exacte, sans entraînement ni réglage.</a:t>
-            </a:r>
-          </a:p>
-        </p:txBody>
-      </p:sp>
-      <p:sp>
-        <p:nvSpPr>
-          <p:cNvPr id="21" name="TextBox 20"/>
-          <p:cNvSpPr txBox="1"/>
-          <p:nvPr/>
-        </p:nvSpPr>
-        <p:spPr>
-          <a:xfrm>
-            <a:off x="4617720" y="3136392"/>
-            <a:ext cx="164592" cy="210312"/>
-          </a:xfrm>
-          <a:prstGeom prst="rect">
-            <a:avLst/>
-          </a:prstGeom>
-          <a:noFill/>
-        </p:spPr>
-        <p:txBody>
-          <a:bodyPr wrap="square" anchor="t">
-            <a:spAutoFit/>
-          </a:bodyPr>
-          <a:lstStyle/>
-          <a:p>
-            <a:pPr algn="l"/>
-            <a:r>
-              <a:rPr sz="1600" b="1">
-                <a:solidFill>
-                  <a:srgbClr val="235F45"/>
-                </a:solidFill>
-                <a:latin typeface="Aptos"/>
-              </a:rPr>
-              <a:t>•</a:t>
-            </a:r>
-          </a:p>
-        </p:txBody>
-      </p:sp>
-      <p:sp>
-        <p:nvSpPr>
-          <p:cNvPr id="22" name="TextBox 21"/>
-          <p:cNvSpPr txBox="1"/>
-          <p:nvPr/>
-        </p:nvSpPr>
-        <p:spPr>
-          <a:xfrm>
-            <a:off x="4846320" y="3136392"/>
-            <a:ext cx="2761488" cy="438912"/>
-          </a:xfrm>
-          <a:prstGeom prst="rect">
-            <a:avLst/>
-          </a:prstGeom>
-          <a:noFill/>
-        </p:spPr>
-        <p:txBody>
-          <a:bodyPr wrap="square" anchor="t">
-            <a:spAutoFit/>
-          </a:bodyPr>
-          <a:lstStyle/>
-          <a:p>
-            <a:pPr algn="l"/>
-            <a:r>
-              <a:rPr sz="1300" b="0">
-                <a:solidFill>
-                  <a:srgbClr val="62584D"/>
-                </a:solidFill>
-                <a:latin typeface="Aptos"/>
-              </a:rPr>
-              <a:t>~65 000 chunks : quelques ms par requête, donc Flat suffit.</a:t>
-            </a:r>
-          </a:p>
-        </p:txBody>
-      </p:sp>
-      <p:sp>
-        <p:nvSpPr>
-          <p:cNvPr id="23" name="TextBox 22"/>
-          <p:cNvSpPr txBox="1"/>
-          <p:nvPr/>
-        </p:nvSpPr>
-        <p:spPr>
-          <a:xfrm>
-            <a:off x="4617720" y="3758184"/>
-            <a:ext cx="164592" cy="210312"/>
-          </a:xfrm>
-          <a:prstGeom prst="rect">
-            <a:avLst/>
-          </a:prstGeom>
-          <a:noFill/>
-        </p:spPr>
-        <p:txBody>
-          <a:bodyPr wrap="square" anchor="t">
-            <a:spAutoFit/>
-          </a:bodyPr>
-          <a:lstStyle/>
-          <a:p>
-            <a:pPr algn="l"/>
-            <a:r>
-              <a:rPr sz="1600" b="1">
-                <a:solidFill>
-                  <a:srgbClr val="235F45"/>
-                </a:solidFill>
-                <a:latin typeface="Aptos"/>
-              </a:rPr>
-              <a:t>•</a:t>
-            </a:r>
-          </a:p>
-        </p:txBody>
-      </p:sp>
-      <p:sp>
-        <p:nvSpPr>
-          <p:cNvPr id="24" name="TextBox 23"/>
-          <p:cNvSpPr txBox="1"/>
-          <p:nvPr/>
-        </p:nvSpPr>
-        <p:spPr>
-          <a:xfrm>
-            <a:off x="4846320" y="3758184"/>
-            <a:ext cx="2761488" cy="438912"/>
-          </a:xfrm>
-          <a:prstGeom prst="rect">
-            <a:avLst/>
-          </a:prstGeom>
-          <a:noFill/>
-        </p:spPr>
-        <p:txBody>
-          <a:bodyPr wrap="square" anchor="t">
-            <a:spAutoFit/>
-          </a:bodyPr>
-          <a:lstStyle/>
-          <a:p>
-            <a:pPr algn="l"/>
-            <a:r>
-              <a:rPr sz="1300" b="0">
-                <a:solidFill>
-                  <a:srgbClr val="62584D"/>
-                </a:solidFill>
-                <a:latin typeface="Aptos"/>
-              </a:rPr>
-              <a:t>IVF : plus rapide à grande échelle, mais nlist/nprobe et recall approché.</a:t>
-            </a:r>
-          </a:p>
-        </p:txBody>
-      </p:sp>
-      <p:sp>
-        <p:nvSpPr>
-          <p:cNvPr id="25" name="TextBox 24"/>
-          <p:cNvSpPr txBox="1"/>
-          <p:nvPr/>
-        </p:nvSpPr>
-        <p:spPr>
-          <a:xfrm>
-            <a:off x="4617720" y="4379976"/>
-            <a:ext cx="164592" cy="210312"/>
-          </a:xfrm>
-          <a:prstGeom prst="rect">
-            <a:avLst/>
-          </a:prstGeom>
-          <a:noFill/>
-        </p:spPr>
-        <p:txBody>
-          <a:bodyPr wrap="square" anchor="t">
-            <a:spAutoFit/>
-          </a:bodyPr>
-          <a:lstStyle/>
-          <a:p>
-            <a:pPr algn="l"/>
-            <a:r>
-              <a:rPr sz="1600" b="1">
-                <a:solidFill>
-                  <a:srgbClr val="235F45"/>
-                </a:solidFill>
-                <a:latin typeface="Aptos"/>
-              </a:rPr>
-              <a:t>•</a:t>
-            </a:r>
-          </a:p>
-        </p:txBody>
-      </p:sp>
-      <p:sp>
-        <p:nvSpPr>
-          <p:cNvPr id="26" name="TextBox 25"/>
-          <p:cNvSpPr txBox="1"/>
-          <p:nvPr/>
-        </p:nvSpPr>
-        <p:spPr>
-          <a:xfrm>
-            <a:off x="4846320" y="4379976"/>
-            <a:ext cx="2761488" cy="438912"/>
-          </a:xfrm>
-          <a:prstGeom prst="rect">
-            <a:avLst/>
-          </a:prstGeom>
-          <a:noFill/>
-        </p:spPr>
-        <p:txBody>
-          <a:bodyPr wrap="square" anchor="t">
-            <a:spAutoFit/>
-          </a:bodyPr>
-          <a:lstStyle/>
-          <a:p>
-            <a:pPr algn="l"/>
-            <a:r>
-              <a:rPr sz="1300" b="0">
-                <a:solidFill>
-                  <a:srgbClr val="62584D"/>
-                </a:solidFill>
-                <a:latin typeface="Aptos"/>
-              </a:rPr>
-              <a:t>HNSW : faible latence, mais plus de mémoire et de paramètres.</a:t>
-            </a:r>
-          </a:p>
-        </p:txBody>
-      </p:sp>
-      <p:sp>
-        <p:nvSpPr>
-          <p:cNvPr id="27" name="Rounded Rectangle 26"/>
+                  <a:srgbClr val="FFFFFF"/>
+                </a:solidFill>
+                <a:latin typeface="Aptos"/>
+              </a:rPr>
+              <a:t>Embedding</a:t>
+            </a:r>
+          </a:p>
+        </p:txBody>
+      </p:sp>
+      <p:sp>
+        <p:nvSpPr>
+          <p:cNvPr id="15" name="TextBox 14"/>
+          <p:cNvSpPr txBox="1"/>
+          <p:nvPr/>
+        </p:nvSpPr>
+        <p:spPr>
+          <a:xfrm>
+            <a:off x="2935224" y="2971800"/>
+            <a:ext cx="1673352" cy="548640"/>
+          </a:xfrm>
+          <a:prstGeom prst="rect">
+            <a:avLst/>
+          </a:prstGeom>
+          <a:noFill/>
+        </p:spPr>
+        <p:txBody>
+          <a:bodyPr wrap="square" anchor="t">
+            <a:spAutoFit/>
+          </a:bodyPr>
+          <a:lstStyle/>
+          <a:p>
+            <a:pPr algn="ctr"/>
+            <a:r>
+              <a:rPr sz="1100" b="0">
+                <a:solidFill>
+                  <a:srgbClr val="FFFFFF"/>
+                </a:solidFill>
+                <a:latin typeface="Aptos"/>
+              </a:rPr>
+              <a:t>Vecteur de la question</a:t>
+            </a:r>
+          </a:p>
+        </p:txBody>
+      </p:sp>
+      <p:sp>
+        <p:nvSpPr>
+          <p:cNvPr id="16" name="TextBox 15"/>
+          <p:cNvSpPr txBox="1"/>
+          <p:nvPr/>
+        </p:nvSpPr>
+        <p:spPr>
+          <a:xfrm>
+            <a:off x="4782312" y="2852928"/>
+            <a:ext cx="274320" cy="228600"/>
+          </a:xfrm>
+          <a:prstGeom prst="rect">
+            <a:avLst/>
+          </a:prstGeom>
+          <a:noFill/>
+        </p:spPr>
+        <p:txBody>
+          <a:bodyPr wrap="square" anchor="t">
+            <a:spAutoFit/>
+          </a:bodyPr>
+          <a:lstStyle/>
+          <a:p>
+            <a:pPr algn="ctr"/>
+            <a:r>
+              <a:rPr sz="1800" b="1">
+                <a:solidFill>
+                  <a:srgbClr val="7F2F16"/>
+                </a:solidFill>
+                <a:latin typeface="Aptos"/>
+              </a:rPr>
+              <a:t>→</a:t>
+            </a:r>
+          </a:p>
+        </p:txBody>
+      </p:sp>
+      <p:sp>
+        <p:nvSpPr>
+          <p:cNvPr id="17" name="Rounded Rectangle 16"/>
           <p:cNvSpPr/>
           <p:nvPr/>
         </p:nvSpPr>
         <p:spPr>
           <a:xfrm>
-            <a:off x="8046720" y="1828800"/>
-            <a:ext cx="3520440" cy="3611880"/>
+            <a:off x="5138927" y="2240280"/>
+            <a:ext cx="1965960" cy="1691640"/>
           </a:xfrm>
           <a:prstGeom prst="roundRect">
             <a:avLst>
@@ -13771,11 +13819,11 @@
             </a:avLst>
           </a:prstGeom>
           <a:solidFill>
-            <a:srgbClr val="FFFAF2"/>
+            <a:srgbClr val="B74F2A"/>
           </a:solidFill>
           <a:ln>
             <a:solidFill>
-              <a:srgbClr val="E1D5C7"/>
+              <a:srgbClr val="B74F2A"/>
             </a:solidFill>
           </a:ln>
         </p:spPr>
@@ -13803,245 +13851,412 @@
       </p:sp>
       <p:sp>
         <p:nvSpPr>
+          <p:cNvPr id="18" name="TextBox 17"/>
+          <p:cNvSpPr txBox="1"/>
+          <p:nvPr/>
+        </p:nvSpPr>
+        <p:spPr>
+          <a:xfrm>
+            <a:off x="5285231" y="2523744"/>
+            <a:ext cx="1673352" cy="228600"/>
+          </a:xfrm>
+          <a:prstGeom prst="rect">
+            <a:avLst/>
+          </a:prstGeom>
+          <a:noFill/>
+        </p:spPr>
+        <p:txBody>
+          <a:bodyPr wrap="square" anchor="t">
+            <a:spAutoFit/>
+          </a:bodyPr>
+          <a:lstStyle/>
+          <a:p>
+            <a:pPr algn="ctr"/>
+            <a:r>
+              <a:rPr sz="1600" b="1">
+                <a:solidFill>
+                  <a:srgbClr val="FFFFFF"/>
+                </a:solidFill>
+                <a:latin typeface="Aptos"/>
+              </a:rPr>
+              <a:t>Pool</a:t>
+            </a:r>
+          </a:p>
+        </p:txBody>
+      </p:sp>
+      <p:sp>
+        <p:nvSpPr>
+          <p:cNvPr id="19" name="TextBox 18"/>
+          <p:cNvSpPr txBox="1"/>
+          <p:nvPr/>
+        </p:nvSpPr>
+        <p:spPr>
+          <a:xfrm>
+            <a:off x="5285231" y="2971800"/>
+            <a:ext cx="1673352" cy="548640"/>
+          </a:xfrm>
+          <a:prstGeom prst="rect">
+            <a:avLst/>
+          </a:prstGeom>
+          <a:noFill/>
+        </p:spPr>
+        <p:txBody>
+          <a:bodyPr wrap="square" anchor="t">
+            <a:spAutoFit/>
+          </a:bodyPr>
+          <a:lstStyle/>
+          <a:p>
+            <a:pPr algn="ctr"/>
+            <a:r>
+              <a:rPr sz="1100" b="0">
+                <a:solidFill>
+                  <a:srgbClr val="FFFFFF"/>
+                </a:solidFill>
+                <a:latin typeface="Aptos"/>
+              </a:rPr>
+              <a:t>FAISS cherche ×20
+(minimum 100)</a:t>
+            </a:r>
+          </a:p>
+        </p:txBody>
+      </p:sp>
+      <p:sp>
+        <p:nvSpPr>
+          <p:cNvPr id="20" name="TextBox 19"/>
+          <p:cNvSpPr txBox="1"/>
+          <p:nvPr/>
+        </p:nvSpPr>
+        <p:spPr>
+          <a:xfrm>
+            <a:off x="7132319" y="2852928"/>
+            <a:ext cx="274320" cy="228600"/>
+          </a:xfrm>
+          <a:prstGeom prst="rect">
+            <a:avLst/>
+          </a:prstGeom>
+          <a:noFill/>
+        </p:spPr>
+        <p:txBody>
+          <a:bodyPr wrap="square" anchor="t">
+            <a:spAutoFit/>
+          </a:bodyPr>
+          <a:lstStyle/>
+          <a:p>
+            <a:pPr algn="ctr"/>
+            <a:r>
+              <a:rPr sz="1800" b="1">
+                <a:solidFill>
+                  <a:srgbClr val="7F2F16"/>
+                </a:solidFill>
+                <a:latin typeface="Aptos"/>
+              </a:rPr>
+              <a:t>→</a:t>
+            </a:r>
+          </a:p>
+        </p:txBody>
+      </p:sp>
+      <p:sp>
+        <p:nvSpPr>
+          <p:cNvPr id="21" name="Rounded Rectangle 20"/>
+          <p:cNvSpPr/>
+          <p:nvPr/>
+        </p:nvSpPr>
+        <p:spPr>
+          <a:xfrm>
+            <a:off x="7488936" y="2240280"/>
+            <a:ext cx="1965960" cy="1691640"/>
+          </a:xfrm>
+          <a:prstGeom prst="roundRect">
+            <a:avLst>
+              <a:gd name="adj" fmla="val 12000"/>
+            </a:avLst>
+          </a:prstGeom>
+          <a:solidFill>
+            <a:srgbClr val="235F45"/>
+          </a:solidFill>
+          <a:ln>
+            <a:solidFill>
+              <a:srgbClr val="235F45"/>
+            </a:solidFill>
+          </a:ln>
+        </p:spPr>
+        <p:style>
+          <a:lnRef idx="1">
+            <a:schemeClr val="accent1"/>
+          </a:lnRef>
+          <a:fillRef idx="3">
+            <a:schemeClr val="accent1"/>
+          </a:fillRef>
+          <a:effectRef idx="2">
+            <a:schemeClr val="accent1"/>
+          </a:effectRef>
+          <a:fontRef idx="minor">
+            <a:schemeClr val="lt1"/>
+          </a:fontRef>
+        </p:style>
+        <p:txBody>
+          <a:bodyPr rtlCol="0" anchor="ctr"/>
+          <a:lstStyle/>
+          <a:p>
+            <a:pPr algn="ctr"/>
+          </a:p>
+        </p:txBody>
+      </p:sp>
+      <p:sp>
+        <p:nvSpPr>
+          <p:cNvPr id="22" name="TextBox 21"/>
+          <p:cNvSpPr txBox="1"/>
+          <p:nvPr/>
+        </p:nvSpPr>
+        <p:spPr>
+          <a:xfrm>
+            <a:off x="7635240" y="2523744"/>
+            <a:ext cx="1673352" cy="228600"/>
+          </a:xfrm>
+          <a:prstGeom prst="rect">
+            <a:avLst/>
+          </a:prstGeom>
+          <a:noFill/>
+        </p:spPr>
+        <p:txBody>
+          <a:bodyPr wrap="square" anchor="t">
+            <a:spAutoFit/>
+          </a:bodyPr>
+          <a:lstStyle/>
+          <a:p>
+            <a:pPr algn="ctr"/>
+            <a:r>
+              <a:rPr sz="1600" b="1">
+                <a:solidFill>
+                  <a:srgbClr val="FFFFFF"/>
+                </a:solidFill>
+                <a:latin typeface="Aptos"/>
+              </a:rPr>
+              <a:t>Filtre</a:t>
+            </a:r>
+          </a:p>
+        </p:txBody>
+      </p:sp>
+      <p:sp>
+        <p:nvSpPr>
+          <p:cNvPr id="23" name="TextBox 22"/>
+          <p:cNvSpPr txBox="1"/>
+          <p:nvPr/>
+        </p:nvSpPr>
+        <p:spPr>
+          <a:xfrm>
+            <a:off x="7635240" y="2971800"/>
+            <a:ext cx="1673352" cy="548640"/>
+          </a:xfrm>
+          <a:prstGeom prst="rect">
+            <a:avLst/>
+          </a:prstGeom>
+          <a:noFill/>
+        </p:spPr>
+        <p:txBody>
+          <a:bodyPr wrap="square" anchor="t">
+            <a:spAutoFit/>
+          </a:bodyPr>
+          <a:lstStyle/>
+          <a:p>
+            <a:pPr algn="ctr"/>
+            <a:r>
+              <a:rPr sz="1100" b="0">
+                <a:solidFill>
+                  <a:srgbClr val="FFFFFF"/>
+                </a:solidFill>
+                <a:latin typeface="Aptos"/>
+              </a:rPr>
+              <a:t>Écarter les événements
+déjà terminés</a:t>
+            </a:r>
+          </a:p>
+        </p:txBody>
+      </p:sp>
+      <p:sp>
+        <p:nvSpPr>
+          <p:cNvPr id="24" name="TextBox 23"/>
+          <p:cNvSpPr txBox="1"/>
+          <p:nvPr/>
+        </p:nvSpPr>
+        <p:spPr>
+          <a:xfrm>
+            <a:off x="9482328" y="2852928"/>
+            <a:ext cx="274320" cy="228600"/>
+          </a:xfrm>
+          <a:prstGeom prst="rect">
+            <a:avLst/>
+          </a:prstGeom>
+          <a:noFill/>
+        </p:spPr>
+        <p:txBody>
+          <a:bodyPr wrap="square" anchor="t">
+            <a:spAutoFit/>
+          </a:bodyPr>
+          <a:lstStyle/>
+          <a:p>
+            <a:pPr algn="ctr"/>
+            <a:r>
+              <a:rPr sz="1800" b="1">
+                <a:solidFill>
+                  <a:srgbClr val="7F2F16"/>
+                </a:solidFill>
+                <a:latin typeface="Aptos"/>
+              </a:rPr>
+              <a:t>→</a:t>
+            </a:r>
+          </a:p>
+        </p:txBody>
+      </p:sp>
+      <p:sp>
+        <p:nvSpPr>
+          <p:cNvPr id="25" name="Rounded Rectangle 24"/>
+          <p:cNvSpPr/>
+          <p:nvPr/>
+        </p:nvSpPr>
+        <p:spPr>
+          <a:xfrm>
+            <a:off x="9838944" y="2240280"/>
+            <a:ext cx="1965960" cy="1691640"/>
+          </a:xfrm>
+          <a:prstGeom prst="roundRect">
+            <a:avLst>
+              <a:gd name="adj" fmla="val 12000"/>
+            </a:avLst>
+          </a:prstGeom>
+          <a:solidFill>
+            <a:srgbClr val="B74F2A"/>
+          </a:solidFill>
+          <a:ln>
+            <a:solidFill>
+              <a:srgbClr val="B74F2A"/>
+            </a:solidFill>
+          </a:ln>
+        </p:spPr>
+        <p:style>
+          <a:lnRef idx="1">
+            <a:schemeClr val="accent1"/>
+          </a:lnRef>
+          <a:fillRef idx="3">
+            <a:schemeClr val="accent1"/>
+          </a:fillRef>
+          <a:effectRef idx="2">
+            <a:schemeClr val="accent1"/>
+          </a:effectRef>
+          <a:fontRef idx="minor">
+            <a:schemeClr val="lt1"/>
+          </a:fontRef>
+        </p:style>
+        <p:txBody>
+          <a:bodyPr rtlCol="0" anchor="ctr"/>
+          <a:lstStyle/>
+          <a:p>
+            <a:pPr algn="ctr"/>
+          </a:p>
+        </p:txBody>
+      </p:sp>
+      <p:sp>
+        <p:nvSpPr>
+          <p:cNvPr id="26" name="TextBox 25"/>
+          <p:cNvSpPr txBox="1"/>
+          <p:nvPr/>
+        </p:nvSpPr>
+        <p:spPr>
+          <a:xfrm>
+            <a:off x="9985248" y="2523744"/>
+            <a:ext cx="1673352" cy="228600"/>
+          </a:xfrm>
+          <a:prstGeom prst="rect">
+            <a:avLst/>
+          </a:prstGeom>
+          <a:noFill/>
+        </p:spPr>
+        <p:txBody>
+          <a:bodyPr wrap="square" anchor="t">
+            <a:spAutoFit/>
+          </a:bodyPr>
+          <a:lstStyle/>
+          <a:p>
+            <a:pPr algn="ctr"/>
+            <a:r>
+              <a:rPr sz="1600" b="1">
+                <a:solidFill>
+                  <a:srgbClr val="FFFFFF"/>
+                </a:solidFill>
+                <a:latin typeface="Aptos"/>
+              </a:rPr>
+              <a:t>Réponse</a:t>
+            </a:r>
+          </a:p>
+        </p:txBody>
+      </p:sp>
+      <p:sp>
+        <p:nvSpPr>
+          <p:cNvPr id="27" name="TextBox 26"/>
+          <p:cNvSpPr txBox="1"/>
+          <p:nvPr/>
+        </p:nvSpPr>
+        <p:spPr>
+          <a:xfrm>
+            <a:off x="9985248" y="2971800"/>
+            <a:ext cx="1673352" cy="548640"/>
+          </a:xfrm>
+          <a:prstGeom prst="rect">
+            <a:avLst/>
+          </a:prstGeom>
+          <a:noFill/>
+        </p:spPr>
+        <p:txBody>
+          <a:bodyPr wrap="square" anchor="t">
+            <a:spAutoFit/>
+          </a:bodyPr>
+          <a:lstStyle/>
+          <a:p>
+            <a:pPr algn="ctr"/>
+            <a:r>
+              <a:rPr sz="1100" b="0">
+                <a:solidFill>
+                  <a:srgbClr val="FFFFFF"/>
+                </a:solidFill>
+                <a:latin typeface="Aptos"/>
+              </a:rPr>
+              <a:t>Mistral rédige depuis
+le contexte</a:t>
+            </a:r>
+          </a:p>
+        </p:txBody>
+      </p:sp>
+      <p:sp>
+        <p:nvSpPr>
           <p:cNvPr id="28" name="TextBox 27"/>
           <p:cNvSpPr txBox="1"/>
           <p:nvPr/>
         </p:nvSpPr>
         <p:spPr>
           <a:xfrm>
-            <a:off x="8302752" y="2048256"/>
-            <a:ext cx="3008376" cy="320040"/>
-          </a:xfrm>
-          <a:prstGeom prst="rect">
-            <a:avLst/>
-          </a:prstGeom>
-          <a:noFill/>
-        </p:spPr>
-        <p:txBody>
-          <a:bodyPr wrap="square" anchor="t">
-            <a:spAutoFit/>
-          </a:bodyPr>
-          <a:lstStyle/>
-          <a:p>
-            <a:pPr algn="l"/>
-            <a:r>
-              <a:rPr sz="1600" b="1">
-                <a:solidFill>
-                  <a:srgbClr val="1F1B16"/>
-                </a:solidFill>
-                <a:latin typeface="Aptos"/>
-              </a:rPr>
-              <a:t>LangChain &amp; FastAPI</a:t>
-            </a:r>
-          </a:p>
-        </p:txBody>
-      </p:sp>
-      <p:sp>
-        <p:nvSpPr>
-          <p:cNvPr id="29" name="TextBox 28"/>
-          <p:cNvSpPr txBox="1"/>
-          <p:nvPr/>
-        </p:nvSpPr>
-        <p:spPr>
-          <a:xfrm>
-            <a:off x="8321040" y="2514600"/>
-            <a:ext cx="164592" cy="210312"/>
-          </a:xfrm>
-          <a:prstGeom prst="rect">
-            <a:avLst/>
-          </a:prstGeom>
-          <a:noFill/>
-        </p:spPr>
-        <p:txBody>
-          <a:bodyPr wrap="square" anchor="t">
-            <a:spAutoFit/>
-          </a:bodyPr>
-          <a:lstStyle/>
-          <a:p>
-            <a:pPr algn="l"/>
-            <a:r>
-              <a:rPr sz="1600" b="1">
-                <a:solidFill>
-                  <a:srgbClr val="B74F2A"/>
-                </a:solidFill>
-                <a:latin typeface="Aptos"/>
-              </a:rPr>
-              <a:t>•</a:t>
-            </a:r>
-          </a:p>
-        </p:txBody>
-      </p:sp>
-      <p:sp>
-        <p:nvSpPr>
-          <p:cNvPr id="30" name="TextBox 29"/>
-          <p:cNvSpPr txBox="1"/>
-          <p:nvPr/>
-        </p:nvSpPr>
-        <p:spPr>
-          <a:xfrm>
-            <a:off x="8549640" y="2514600"/>
-            <a:ext cx="2761488" cy="438912"/>
-          </a:xfrm>
-          <a:prstGeom prst="rect">
-            <a:avLst/>
-          </a:prstGeom>
-          <a:noFill/>
-        </p:spPr>
-        <p:txBody>
-          <a:bodyPr wrap="square" anchor="t">
-            <a:spAutoFit/>
-          </a:bodyPr>
-          <a:lstStyle/>
-          <a:p>
-            <a:pPr algn="l"/>
-            <a:r>
-              <a:rPr sz="1300" b="0">
-                <a:solidFill>
-                  <a:srgbClr val="62584D"/>
-                </a:solidFill>
-                <a:latin typeface="Aptos"/>
-              </a:rPr>
-              <a:t>LangChain : templates de prompt.</a:t>
-            </a:r>
-          </a:p>
-        </p:txBody>
-      </p:sp>
-      <p:sp>
-        <p:nvSpPr>
-          <p:cNvPr id="31" name="TextBox 30"/>
-          <p:cNvSpPr txBox="1"/>
-          <p:nvPr/>
-        </p:nvSpPr>
-        <p:spPr>
-          <a:xfrm>
-            <a:off x="8321040" y="3136392"/>
-            <a:ext cx="164592" cy="210312"/>
-          </a:xfrm>
-          <a:prstGeom prst="rect">
-            <a:avLst/>
-          </a:prstGeom>
-          <a:noFill/>
-        </p:spPr>
-        <p:txBody>
-          <a:bodyPr wrap="square" anchor="t">
-            <a:spAutoFit/>
-          </a:bodyPr>
-          <a:lstStyle/>
-          <a:p>
-            <a:pPr algn="l"/>
-            <a:r>
-              <a:rPr sz="1600" b="1">
-                <a:solidFill>
-                  <a:srgbClr val="B74F2A"/>
-                </a:solidFill>
-                <a:latin typeface="Aptos"/>
-              </a:rPr>
-              <a:t>•</a:t>
-            </a:r>
-          </a:p>
-        </p:txBody>
-      </p:sp>
-      <p:sp>
-        <p:nvSpPr>
-          <p:cNvPr id="32" name="TextBox 31"/>
-          <p:cNvSpPr txBox="1"/>
-          <p:nvPr/>
-        </p:nvSpPr>
-        <p:spPr>
-          <a:xfrm>
-            <a:off x="8549640" y="3136392"/>
-            <a:ext cx="2761488" cy="438912"/>
-          </a:xfrm>
-          <a:prstGeom prst="rect">
-            <a:avLst/>
-          </a:prstGeom>
-          <a:noFill/>
-        </p:spPr>
-        <p:txBody>
-          <a:bodyPr wrap="square" anchor="t">
-            <a:spAutoFit/>
-          </a:bodyPr>
-          <a:lstStyle/>
-          <a:p>
-            <a:pPr algn="l"/>
-            <a:r>
-              <a:rPr sz="1300" b="0">
-                <a:solidFill>
-                  <a:srgbClr val="62584D"/>
-                </a:solidFill>
-                <a:latin typeface="Aptos"/>
-              </a:rPr>
-              <a:t>Logique de retrieval gardée explicite.</a:t>
-            </a:r>
-          </a:p>
-        </p:txBody>
-      </p:sp>
-      <p:sp>
-        <p:nvSpPr>
-          <p:cNvPr id="33" name="TextBox 32"/>
-          <p:cNvSpPr txBox="1"/>
-          <p:nvPr/>
-        </p:nvSpPr>
-        <p:spPr>
-          <a:xfrm>
-            <a:off x="8321040" y="3758184"/>
-            <a:ext cx="164592" cy="210312"/>
-          </a:xfrm>
-          <a:prstGeom prst="rect">
-            <a:avLst/>
-          </a:prstGeom>
-          <a:noFill/>
-        </p:spPr>
-        <p:txBody>
-          <a:bodyPr wrap="square" anchor="t">
-            <a:spAutoFit/>
-          </a:bodyPr>
-          <a:lstStyle/>
-          <a:p>
-            <a:pPr algn="l"/>
-            <a:r>
-              <a:rPr sz="1600" b="1">
-                <a:solidFill>
-                  <a:srgbClr val="B74F2A"/>
-                </a:solidFill>
-                <a:latin typeface="Aptos"/>
-              </a:rPr>
-              <a:t>•</a:t>
-            </a:r>
-          </a:p>
-        </p:txBody>
-      </p:sp>
-      <p:sp>
-        <p:nvSpPr>
-          <p:cNvPr id="34" name="TextBox 33"/>
-          <p:cNvSpPr txBox="1"/>
-          <p:nvPr/>
-        </p:nvSpPr>
-        <p:spPr>
-          <a:xfrm>
-            <a:off x="8549640" y="3758184"/>
-            <a:ext cx="2761488" cy="438912"/>
-          </a:xfrm>
-          <a:prstGeom prst="rect">
-            <a:avLst/>
-          </a:prstGeom>
-          <a:noFill/>
-        </p:spPr>
-        <p:txBody>
-          <a:bodyPr wrap="square" anchor="t">
-            <a:spAutoFit/>
-          </a:bodyPr>
-          <a:lstStyle/>
-          <a:p>
-            <a:pPr algn="l"/>
-            <a:r>
-              <a:rPr sz="1300" b="0">
-                <a:solidFill>
-                  <a:srgbClr val="62584D"/>
-                </a:solidFill>
-                <a:latin typeface="Aptos"/>
-              </a:rPr>
-              <a:t>FastAPI : validation et Swagger intégrés.</a:t>
+            <a:off x="1051560" y="4846320"/>
+            <a:ext cx="10058400" cy="274320"/>
+          </a:xfrm>
+          <a:prstGeom prst="rect">
+            <a:avLst/>
+          </a:prstGeom>
+          <a:noFill/>
+        </p:spPr>
+        <p:txBody>
+          <a:bodyPr wrap="square" anchor="t">
+            <a:spAutoFit/>
+          </a:bodyPr>
+          <a:lstStyle/>
+          <a:p>
+            <a:pPr algn="ctr"/>
+            <a:r>
+              <a:rPr sz="1400" b="1">
+                <a:solidFill>
+                  <a:srgbClr val="7F2F16"/>
+                </a:solidFill>
+                <a:latin typeface="Aptos"/>
+              </a:rPr>
+              <a:t>Puis les 5 meilleurs résultats restants fournissent au plus 4 éléments de contexte au modèle de génération.</a:t>
             </a:r>
           </a:p>
         </p:txBody>
